--- a/project_01_airfare_price_prediction/presentations/project_presentation.pptx
+++ b/project_01_airfare_price_prediction/presentations/project_presentation.pptx
@@ -13,6 +13,13 @@
     <p:sldId id="261" r:id="rId12"/>
     <p:sldId id="262" r:id="rId13"/>
     <p:sldId id="263" r:id="rId14"/>
+    <p:sldId id="264" r:id="rId15"/>
+    <p:sldId id="265" r:id="rId16"/>
+    <p:sldId id="266" r:id="rId17"/>
+    <p:sldId id="267" r:id="rId18"/>
+    <p:sldId id="268" r:id="rId19"/>
+    <p:sldId id="269" r:id="rId20"/>
+    <p:sldId id="270" r:id="rId21"/>
   </p:sldIdLst>
   <p:sldSz cx="12191695" cy="6858000" type="screen4x3"/>
   <p:notesSz cx="6858000" cy="9144000"/>
@@ -3113,7 +3120,9 @@
             <a:srgbClr val="0F172A"/>
           </a:solidFill>
           <a:ln>
-            <a:noFill/>
+            <a:solidFill>
+              <a:srgbClr val="0F172A"/>
+            </a:solidFill>
           </a:ln>
         </p:spPr>
         <p:style>
@@ -3146,8 +3155,8 @@
         </p:nvSpPr>
         <p:spPr>
           <a:xfrm>
-            <a:off x="1097280" y="1645920"/>
-            <a:ext cx="10058400" cy="3474720"/>
+            <a:off x="1097280" y="1828800"/>
+            <a:ext cx="10058400" cy="3200400"/>
           </a:xfrm>
           <a:prstGeom prst="rect">
             <a:avLst/>
@@ -3163,20 +3172,20 @@
             <a:pPr>
               <a:defRPr sz="1400" b="1">
                 <a:solidFill>
-                  <a:srgbClr val="38BDF8"/>
-                </a:solidFill>
-              </a:defRPr>
-            </a:pPr>
-            <a:r>
-              <a:t>PROJECT 01 OF 55  •  RESEARCH &amp; IMPLEMENTATION DECK</a:t>
-            </a:r>
-          </a:p>
-          <a:p>
-            <a:pPr>
-              <a:spcBef>
-                <a:spcPts val="1400"/>
-              </a:spcBef>
-              <a:defRPr sz="3200" b="1">
+                  <a:srgbClr val="0284C7"/>
+                </a:solidFill>
+              </a:defRPr>
+            </a:pPr>
+            <a:r>
+              <a:t>AEROPREDICT INTELLIGENCE ENGINE</a:t>
+            </a:r>
+          </a:p>
+          <a:p>
+            <a:pPr>
+              <a:spcBef>
+                <a:spcPts val="1000"/>
+              </a:spcBef>
+              <a:defRPr sz="3000" b="1">
                 <a:solidFill>
                   <a:srgbClr val="FFFFFF"/>
                 </a:solidFill>
@@ -3189,16 +3198,1869 @@
           <a:p>
             <a:pPr>
               <a:spcBef>
-                <a:spcPts val="1200"/>
-              </a:spcBef>
-              <a:defRPr sz="1600">
-                <a:solidFill>
-                  <a:srgbClr val="CBD5E1"/>
-                </a:solidFill>
-              </a:defRPr>
-            </a:pPr>
-            <a:r>
-              <a:t>Enterprise-Grade AI Architecture, Machine Learning Pipeline &amp; Deployment Framework</a:t>
+                <a:spcPts val="2000"/>
+              </a:spcBef>
+              <a:defRPr sz="1300">
+                <a:solidFill>
+                  <a:srgbClr val="94A3B8"/>
+                </a:solidFill>
+              </a:defRPr>
+            </a:pPr>
+            <a:r>
+              <a:t>PROJECT-001  •  Department of Computer Science &amp; Engineering  •  Academic Year 2026</a:t>
+            </a:r>
+          </a:p>
+        </p:txBody>
+      </p:sp>
+    </p:spTree>
+  </p:cSld>
+  <p:clrMapOvr>
+    <a:masterClrMapping/>
+  </p:clrMapOvr>
+</p:sld>
+</file>
+
+<file path=ppt/slides/slide10.xml><?xml version="1.0" encoding="utf-8"?>
+<p:sld xmlns:a="http://schemas.openxmlformats.org/drawingml/2006/main" xmlns:p="http://schemas.openxmlformats.org/presentationml/2006/main" xmlns:r="http://schemas.openxmlformats.org/officeDocument/2006/relationships">
+  <p:cSld>
+    <p:spTree>
+      <p:nvGrpSpPr>
+        <p:cNvPr id="1" name=""/>
+        <p:cNvGrpSpPr/>
+        <p:nvPr/>
+      </p:nvGrpSpPr>
+      <p:grpSpPr/>
+      <p:sp>
+        <p:nvSpPr>
+          <p:cNvPr id="2" name="TextBox 1"/>
+          <p:cNvSpPr txBox="1"/>
+          <p:nvPr/>
+        </p:nvSpPr>
+        <p:spPr>
+          <a:xfrm>
+            <a:off x="731520" y="457200"/>
+            <a:ext cx="10728655" cy="1005840"/>
+          </a:xfrm>
+          <a:prstGeom prst="rect">
+            <a:avLst/>
+          </a:prstGeom>
+          <a:noFill/>
+        </p:spPr>
+        <p:txBody>
+          <a:bodyPr wrap="square">
+            <a:spAutoFit/>
+          </a:bodyPr>
+          <a:lstStyle/>
+          <a:p>
+            <a:pPr>
+              <a:defRPr sz="1000" b="1">
+                <a:solidFill>
+                  <a:srgbClr val="0284C7"/>
+                </a:solidFill>
+              </a:defRPr>
+            </a:pPr>
+            <a:r>
+              <a:t>PROJECT-001 • FINAL YEAR ENGINEERING PROJECT</a:t>
+            </a:r>
+          </a:p>
+          <a:p>
+            <a:pPr>
+              <a:defRPr sz="2200" b="1">
+                <a:solidFill>
+                  <a:srgbClr val="0F172A"/>
+                </a:solidFill>
+              </a:defRPr>
+            </a:pPr>
+            <a:r>
+              <a:t>9. Persistent SQLite Database Audit Trail</a:t>
+            </a:r>
+          </a:p>
+        </p:txBody>
+      </p:sp>
+      <p:pic>
+        <p:nvPicPr>
+          <p:cNvPr id="3" name="Picture 2" descr="05_database_history_tab.png"/>
+          <p:cNvPicPr>
+            <a:picLocks noChangeAspect="1"/>
+          </p:cNvPicPr>
+          <p:nvPr/>
+        </p:nvPicPr>
+        <p:blipFill>
+          <a:blip r:embed="rId2"/>
+          <a:stretch>
+            <a:fillRect/>
+          </a:stretch>
+        </p:blipFill>
+        <p:spPr>
+          <a:xfrm>
+            <a:off x="731520" y="1645920"/>
+            <a:ext cx="5486400" cy="3429000"/>
+          </a:xfrm>
+          <a:prstGeom prst="rect">
+            <a:avLst/>
+          </a:prstGeom>
+        </p:spPr>
+      </p:pic>
+      <p:sp>
+        <p:nvSpPr>
+          <p:cNvPr id="4" name="Rectangle 3"/>
+          <p:cNvSpPr/>
+          <p:nvPr/>
+        </p:nvSpPr>
+        <p:spPr>
+          <a:xfrm>
+            <a:off x="6492240" y="1645920"/>
+            <a:ext cx="4937760" cy="4572000"/>
+          </a:xfrm>
+          <a:prstGeom prst="rect">
+            <a:avLst/>
+          </a:prstGeom>
+          <a:solidFill>
+            <a:srgbClr val="FFFFFF"/>
+          </a:solidFill>
+          <a:ln>
+            <a:solidFill>
+              <a:srgbClr val="E2E8F0"/>
+            </a:solidFill>
+          </a:ln>
+        </p:spPr>
+        <p:style>
+          <a:lnRef idx="1">
+            <a:schemeClr val="accent1"/>
+          </a:lnRef>
+          <a:fillRef idx="3">
+            <a:schemeClr val="accent1"/>
+          </a:fillRef>
+          <a:effectRef idx="2">
+            <a:schemeClr val="accent1"/>
+          </a:effectRef>
+          <a:fontRef idx="minor">
+            <a:schemeClr val="lt1"/>
+          </a:fontRef>
+        </p:style>
+        <p:txBody>
+          <a:bodyPr rtlCol="0" anchor="ctr"/>
+          <a:lstStyle/>
+          <a:p>
+            <a:pPr algn="ctr"/>
+          </a:p>
+        </p:txBody>
+      </p:sp>
+      <p:sp>
+        <p:nvSpPr>
+          <p:cNvPr id="5" name="TextBox 4"/>
+          <p:cNvSpPr txBox="1"/>
+          <p:nvPr/>
+        </p:nvSpPr>
+        <p:spPr>
+          <a:xfrm>
+            <a:off x="6675120" y="1783080"/>
+            <a:ext cx="4572000" cy="4297680"/>
+          </a:xfrm>
+          <a:prstGeom prst="rect">
+            <a:avLst/>
+          </a:prstGeom>
+          <a:noFill/>
+        </p:spPr>
+        <p:txBody>
+          <a:bodyPr wrap="square">
+            <a:spAutoFit/>
+          </a:bodyPr>
+          <a:lstStyle/>
+          <a:p>
+            <a:pPr>
+              <a:defRPr sz="1300" b="1">
+                <a:solidFill>
+                  <a:srgbClr val="0284C7"/>
+                </a:solidFill>
+              </a:defRPr>
+            </a:pPr>
+            <a:r>
+              <a:t>Audit Trail &amp; Reproducibility</a:t>
+            </a:r>
+          </a:p>
+          <a:p>
+            <a:pPr>
+              <a:spcBef>
+                <a:spcPts val="400"/>
+              </a:spcBef>
+              <a:defRPr sz="1050">
+                <a:solidFill>
+                  <a:srgbClr val="0F172A"/>
+                </a:solidFill>
+              </a:defRPr>
+            </a:pPr>
+            <a:r>
+              <a:t>• Embedded SQLite storage (airfare.db) ensuring complete session persistence.</a:t>
+            </a:r>
+          </a:p>
+          <a:p>
+            <a:pPr>
+              <a:spcBef>
+                <a:spcPts val="400"/>
+              </a:spcBef>
+              <a:defRPr sz="1050">
+                <a:solidFill>
+                  <a:srgbClr val="0F172A"/>
+                </a:solidFill>
+              </a:defRPr>
+            </a:pPr>
+            <a:r>
+              <a:t>• Auto-incrementing record IDs with timestamp, route, date, and stops.</a:t>
+            </a:r>
+          </a:p>
+          <a:p>
+            <a:pPr>
+              <a:spcBef>
+                <a:spcPts val="400"/>
+              </a:spcBef>
+              <a:defRPr sz="1050">
+                <a:solidFill>
+                  <a:srgbClr val="0F172A"/>
+                </a:solidFill>
+              </a:defRPr>
+            </a:pPr>
+            <a:r>
+              <a:t>• Stores both individual model outputs (LSTM fare &amp; RF fare) and recommended price.</a:t>
+            </a:r>
+          </a:p>
+          <a:p>
+            <a:pPr>
+              <a:spcBef>
+                <a:spcPts val="400"/>
+              </a:spcBef>
+              <a:defRPr sz="1050">
+                <a:solidFill>
+                  <a:srgbClr val="0F172A"/>
+                </a:solidFill>
+              </a:defRPr>
+            </a:pPr>
+            <a:r>
+              <a:t>• Provides instant recall table supporting real-time college evaluator inspection.</a:t>
+            </a:r>
+          </a:p>
+        </p:txBody>
+      </p:sp>
+    </p:spTree>
+  </p:cSld>
+  <p:clrMapOvr>
+    <a:masterClrMapping/>
+  </p:clrMapOvr>
+</p:sld>
+</file>
+
+<file path=ppt/slides/slide11.xml><?xml version="1.0" encoding="utf-8"?>
+<p:sld xmlns:a="http://schemas.openxmlformats.org/drawingml/2006/main" xmlns:p="http://schemas.openxmlformats.org/presentationml/2006/main" xmlns:r="http://schemas.openxmlformats.org/officeDocument/2006/relationships">
+  <p:cSld>
+    <p:spTree>
+      <p:nvGrpSpPr>
+        <p:cNvPr id="1" name=""/>
+        <p:cNvGrpSpPr/>
+        <p:nvPr/>
+      </p:nvGrpSpPr>
+      <p:grpSpPr/>
+      <p:sp>
+        <p:nvSpPr>
+          <p:cNvPr id="2" name="TextBox 1"/>
+          <p:cNvSpPr txBox="1"/>
+          <p:nvPr/>
+        </p:nvSpPr>
+        <p:spPr>
+          <a:xfrm>
+            <a:off x="731520" y="457200"/>
+            <a:ext cx="10728655" cy="1005840"/>
+          </a:xfrm>
+          <a:prstGeom prst="rect">
+            <a:avLst/>
+          </a:prstGeom>
+          <a:noFill/>
+        </p:spPr>
+        <p:txBody>
+          <a:bodyPr wrap="square">
+            <a:spAutoFit/>
+          </a:bodyPr>
+          <a:lstStyle/>
+          <a:p>
+            <a:pPr>
+              <a:defRPr sz="1000" b="1">
+                <a:solidFill>
+                  <a:srgbClr val="0284C7"/>
+                </a:solidFill>
+              </a:defRPr>
+            </a:pPr>
+            <a:r>
+              <a:t>PROJECT-001 • FINAL YEAR ENGINEERING PROJECT</a:t>
+            </a:r>
+          </a:p>
+          <a:p>
+            <a:pPr>
+              <a:defRPr sz="2200" b="1">
+                <a:solidFill>
+                  <a:srgbClr val="0F172A"/>
+                </a:solidFill>
+              </a:defRPr>
+            </a:pPr>
+            <a:r>
+              <a:t>10. Industry Pricing Analytics</a:t>
+            </a:r>
+          </a:p>
+        </p:txBody>
+      </p:sp>
+      <p:pic>
+        <p:nvPicPr>
+          <p:cNvPr id="3" name="Picture 2" descr="06_pricing_analytics_tab.png"/>
+          <p:cNvPicPr>
+            <a:picLocks noChangeAspect="1"/>
+          </p:cNvPicPr>
+          <p:nvPr/>
+        </p:nvPicPr>
+        <p:blipFill>
+          <a:blip r:embed="rId2"/>
+          <a:stretch>
+            <a:fillRect/>
+          </a:stretch>
+        </p:blipFill>
+        <p:spPr>
+          <a:xfrm>
+            <a:off x="731520" y="1645920"/>
+            <a:ext cx="5486400" cy="3429000"/>
+          </a:xfrm>
+          <a:prstGeom prst="rect">
+            <a:avLst/>
+          </a:prstGeom>
+        </p:spPr>
+      </p:pic>
+      <p:sp>
+        <p:nvSpPr>
+          <p:cNvPr id="4" name="Rectangle 3"/>
+          <p:cNvSpPr/>
+          <p:nvPr/>
+        </p:nvSpPr>
+        <p:spPr>
+          <a:xfrm>
+            <a:off x="6492240" y="1645920"/>
+            <a:ext cx="4937760" cy="4572000"/>
+          </a:xfrm>
+          <a:prstGeom prst="rect">
+            <a:avLst/>
+          </a:prstGeom>
+          <a:solidFill>
+            <a:srgbClr val="FFFFFF"/>
+          </a:solidFill>
+          <a:ln>
+            <a:solidFill>
+              <a:srgbClr val="E2E8F0"/>
+            </a:solidFill>
+          </a:ln>
+        </p:spPr>
+        <p:style>
+          <a:lnRef idx="1">
+            <a:schemeClr val="accent1"/>
+          </a:lnRef>
+          <a:fillRef idx="3">
+            <a:schemeClr val="accent1"/>
+          </a:fillRef>
+          <a:effectRef idx="2">
+            <a:schemeClr val="accent1"/>
+          </a:effectRef>
+          <a:fontRef idx="minor">
+            <a:schemeClr val="lt1"/>
+          </a:fontRef>
+        </p:style>
+        <p:txBody>
+          <a:bodyPr rtlCol="0" anchor="ctr"/>
+          <a:lstStyle/>
+          <a:p>
+            <a:pPr algn="ctr"/>
+          </a:p>
+        </p:txBody>
+      </p:sp>
+      <p:sp>
+        <p:nvSpPr>
+          <p:cNvPr id="5" name="TextBox 4"/>
+          <p:cNvSpPr txBox="1"/>
+          <p:nvPr/>
+        </p:nvSpPr>
+        <p:spPr>
+          <a:xfrm>
+            <a:off x="6675120" y="1783080"/>
+            <a:ext cx="4572000" cy="4297680"/>
+          </a:xfrm>
+          <a:prstGeom prst="rect">
+            <a:avLst/>
+          </a:prstGeom>
+          <a:noFill/>
+        </p:spPr>
+        <p:txBody>
+          <a:bodyPr wrap="square">
+            <a:spAutoFit/>
+          </a:bodyPr>
+          <a:lstStyle/>
+          <a:p>
+            <a:pPr>
+              <a:defRPr sz="1300" b="1">
+                <a:solidFill>
+                  <a:srgbClr val="0284C7"/>
+                </a:solidFill>
+              </a:defRPr>
+            </a:pPr>
+            <a:r>
+              <a:t>Carrier Cost Insights</a:t>
+            </a:r>
+          </a:p>
+          <a:p>
+            <a:pPr>
+              <a:spcBef>
+                <a:spcPts val="400"/>
+              </a:spcBef>
+              <a:defRPr sz="1050">
+                <a:solidFill>
+                  <a:srgbClr val="0F172A"/>
+                </a:solidFill>
+              </a:defRPr>
+            </a:pPr>
+            <a:r>
+              <a:t>• Aggregated average ticket prices across all operating airline companies.</a:t>
+            </a:r>
+          </a:p>
+          <a:p>
+            <a:pPr>
+              <a:spcBef>
+                <a:spcPts val="400"/>
+              </a:spcBef>
+              <a:defRPr sz="1050">
+                <a:solidFill>
+                  <a:srgbClr val="0F172A"/>
+                </a:solidFill>
+              </a:defRPr>
+            </a:pPr>
+            <a:r>
+              <a:t>• Highlights premium pricing structures on Jet Airways and full-service carriers.</a:t>
+            </a:r>
+          </a:p>
+          <a:p>
+            <a:pPr>
+              <a:spcBef>
+                <a:spcPts val="400"/>
+              </a:spcBef>
+              <a:defRPr sz="1050">
+                <a:solidFill>
+                  <a:srgbClr val="0F172A"/>
+                </a:solidFill>
+              </a:defRPr>
+            </a:pPr>
+            <a:r>
+              <a:t>• Demonstrates budget advantages on low-cost carriers (IndiGo, SpiceJet, Air Asia).</a:t>
+            </a:r>
+          </a:p>
+          <a:p>
+            <a:pPr>
+              <a:spcBef>
+                <a:spcPts val="400"/>
+              </a:spcBef>
+              <a:defRPr sz="1050">
+                <a:solidFill>
+                  <a:srgbClr val="0F172A"/>
+                </a:solidFill>
+              </a:defRPr>
+            </a:pPr>
+            <a:r>
+              <a:t>• Provides data-driven decision support for corporate and retail flight procurement.</a:t>
+            </a:r>
+          </a:p>
+        </p:txBody>
+      </p:sp>
+    </p:spTree>
+  </p:cSld>
+  <p:clrMapOvr>
+    <a:masterClrMapping/>
+  </p:clrMapOvr>
+</p:sld>
+</file>
+
+<file path=ppt/slides/slide12.xml><?xml version="1.0" encoding="utf-8"?>
+<p:sld xmlns:a="http://schemas.openxmlformats.org/drawingml/2006/main" xmlns:p="http://schemas.openxmlformats.org/presentationml/2006/main" xmlns:r="http://schemas.openxmlformats.org/officeDocument/2006/relationships">
+  <p:cSld>
+    <p:spTree>
+      <p:nvGrpSpPr>
+        <p:cNvPr id="1" name=""/>
+        <p:cNvGrpSpPr/>
+        <p:nvPr/>
+      </p:nvGrpSpPr>
+      <p:grpSpPr/>
+      <p:sp>
+        <p:nvSpPr>
+          <p:cNvPr id="2" name="TextBox 1"/>
+          <p:cNvSpPr txBox="1"/>
+          <p:nvPr/>
+        </p:nvSpPr>
+        <p:spPr>
+          <a:xfrm>
+            <a:off x="731520" y="457200"/>
+            <a:ext cx="10728655" cy="1005840"/>
+          </a:xfrm>
+          <a:prstGeom prst="rect">
+            <a:avLst/>
+          </a:prstGeom>
+          <a:noFill/>
+        </p:spPr>
+        <p:txBody>
+          <a:bodyPr wrap="square">
+            <a:spAutoFit/>
+          </a:bodyPr>
+          <a:lstStyle/>
+          <a:p>
+            <a:pPr>
+              <a:defRPr sz="1000" b="1">
+                <a:solidFill>
+                  <a:srgbClr val="0284C7"/>
+                </a:solidFill>
+              </a:defRPr>
+            </a:pPr>
+            <a:r>
+              <a:t>PROJECT-001 • FINAL YEAR ENGINEERING PROJECT</a:t>
+            </a:r>
+          </a:p>
+          <a:p>
+            <a:pPr>
+              <a:defRPr sz="2200" b="1">
+                <a:solidFill>
+                  <a:srgbClr val="0F172A"/>
+                </a:solidFill>
+              </a:defRPr>
+            </a:pPr>
+            <a:r>
+              <a:t>11. Quality Assurance &amp; Automated Test Suite</a:t>
+            </a:r>
+          </a:p>
+        </p:txBody>
+      </p:sp>
+      <p:sp>
+        <p:nvSpPr>
+          <p:cNvPr id="3" name="Rectangle 2"/>
+          <p:cNvSpPr/>
+          <p:nvPr/>
+        </p:nvSpPr>
+        <p:spPr>
+          <a:xfrm>
+            <a:off x="731520" y="1645920"/>
+            <a:ext cx="5120640" cy="4572000"/>
+          </a:xfrm>
+          <a:prstGeom prst="rect">
+            <a:avLst/>
+          </a:prstGeom>
+          <a:solidFill>
+            <a:srgbClr val="FFFFFF"/>
+          </a:solidFill>
+          <a:ln>
+            <a:solidFill>
+              <a:srgbClr val="E2E8F0"/>
+            </a:solidFill>
+          </a:ln>
+        </p:spPr>
+        <p:style>
+          <a:lnRef idx="1">
+            <a:schemeClr val="accent1"/>
+          </a:lnRef>
+          <a:fillRef idx="3">
+            <a:schemeClr val="accent1"/>
+          </a:fillRef>
+          <a:effectRef idx="2">
+            <a:schemeClr val="accent1"/>
+          </a:effectRef>
+          <a:fontRef idx="minor">
+            <a:schemeClr val="lt1"/>
+          </a:fontRef>
+        </p:style>
+        <p:txBody>
+          <a:bodyPr rtlCol="0" anchor="ctr"/>
+          <a:lstStyle/>
+          <a:p>
+            <a:pPr algn="ctr"/>
+          </a:p>
+        </p:txBody>
+      </p:sp>
+      <p:sp>
+        <p:nvSpPr>
+          <p:cNvPr id="4" name="TextBox 3"/>
+          <p:cNvSpPr txBox="1"/>
+          <p:nvPr/>
+        </p:nvSpPr>
+        <p:spPr>
+          <a:xfrm>
+            <a:off x="914400" y="1783080"/>
+            <a:ext cx="4754880" cy="4297680"/>
+          </a:xfrm>
+          <a:prstGeom prst="rect">
+            <a:avLst/>
+          </a:prstGeom>
+          <a:noFill/>
+        </p:spPr>
+        <p:txBody>
+          <a:bodyPr wrap="square">
+            <a:spAutoFit/>
+          </a:bodyPr>
+          <a:lstStyle/>
+          <a:p>
+            <a:pPr>
+              <a:defRPr sz="1300" b="1">
+                <a:solidFill>
+                  <a:srgbClr val="0284C7"/>
+                </a:solidFill>
+              </a:defRPr>
+            </a:pPr>
+            <a:r>
+              <a:t>Automated Test Results (18 / 18 Passed)</a:t>
+            </a:r>
+          </a:p>
+          <a:p>
+            <a:pPr>
+              <a:spcBef>
+                <a:spcPts val="400"/>
+              </a:spcBef>
+              <a:defRPr sz="1050">
+                <a:solidFill>
+                  <a:srgbClr val="0F172A"/>
+                </a:solidFill>
+              </a:defRPr>
+            </a:pPr>
+            <a:r>
+              <a:t>• test_api_endpoints.py (7 Tests): Health status, options metadata, predict validation, error codes (422), history retrieval, analytics.</a:t>
+            </a:r>
+          </a:p>
+          <a:p>
+            <a:pPr>
+              <a:spcBef>
+                <a:spcPts val="400"/>
+              </a:spcBef>
+              <a:defRPr sz="1050">
+                <a:solidFill>
+                  <a:srgbClr val="0F172A"/>
+                </a:solidFill>
+              </a:defRPr>
+            </a:pPr>
+            <a:r>
+              <a:t>• test_lstm_model.py (4 Tests): Checkpoint loading, forward tensor pass shape (batch, seq, feat), prediction bounds, stop penalty factor.</a:t>
+            </a:r>
+          </a:p>
+          <a:p>
+            <a:pPr>
+              <a:spcBef>
+                <a:spcPts val="400"/>
+              </a:spcBef>
+              <a:defRPr sz="1050">
+                <a:solidFill>
+                  <a:srgbClr val="0F172A"/>
+                </a:solidFill>
+              </a:defRPr>
+            </a:pPr>
+            <a:r>
+              <a:t>• test_database.py (3 Tests): SQLite initialization, table creation, logging queries, aggregate statistics generation.</a:t>
+            </a:r>
+          </a:p>
+          <a:p>
+            <a:pPr>
+              <a:spcBef>
+                <a:spcPts val="400"/>
+              </a:spcBef>
+              <a:defRPr sz="1050">
+                <a:solidFill>
+                  <a:srgbClr val="0F172A"/>
+                </a:solidFill>
+              </a:defRPr>
+            </a:pPr>
+            <a:r>
+              <a:t>• test_audit_verification.py (4 Tests): File structure, documentation presence, requirements conformity.</a:t>
+            </a:r>
+          </a:p>
+        </p:txBody>
+      </p:sp>
+      <p:sp>
+        <p:nvSpPr>
+          <p:cNvPr id="5" name="Rectangle 4"/>
+          <p:cNvSpPr/>
+          <p:nvPr/>
+        </p:nvSpPr>
+        <p:spPr>
+          <a:xfrm>
+            <a:off x="6217920" y="1645920"/>
+            <a:ext cx="5212080" cy="4572000"/>
+          </a:xfrm>
+          <a:prstGeom prst="rect">
+            <a:avLst/>
+          </a:prstGeom>
+          <a:solidFill>
+            <a:srgbClr val="FFFFFF"/>
+          </a:solidFill>
+          <a:ln>
+            <a:solidFill>
+              <a:srgbClr val="E2E8F0"/>
+            </a:solidFill>
+          </a:ln>
+        </p:spPr>
+        <p:style>
+          <a:lnRef idx="1">
+            <a:schemeClr val="accent1"/>
+          </a:lnRef>
+          <a:fillRef idx="3">
+            <a:schemeClr val="accent1"/>
+          </a:fillRef>
+          <a:effectRef idx="2">
+            <a:schemeClr val="accent1"/>
+          </a:effectRef>
+          <a:fontRef idx="minor">
+            <a:schemeClr val="lt1"/>
+          </a:fontRef>
+        </p:style>
+        <p:txBody>
+          <a:bodyPr rtlCol="0" anchor="ctr"/>
+          <a:lstStyle/>
+          <a:p>
+            <a:pPr algn="ctr"/>
+          </a:p>
+        </p:txBody>
+      </p:sp>
+      <p:sp>
+        <p:nvSpPr>
+          <p:cNvPr id="6" name="TextBox 5"/>
+          <p:cNvSpPr txBox="1"/>
+          <p:nvPr/>
+        </p:nvSpPr>
+        <p:spPr>
+          <a:xfrm>
+            <a:off x="6400800" y="1783080"/>
+            <a:ext cx="4846320" cy="4297680"/>
+          </a:xfrm>
+          <a:prstGeom prst="rect">
+            <a:avLst/>
+          </a:prstGeom>
+          <a:noFill/>
+        </p:spPr>
+        <p:txBody>
+          <a:bodyPr wrap="square">
+            <a:spAutoFit/>
+          </a:bodyPr>
+          <a:lstStyle/>
+          <a:p>
+            <a:pPr>
+              <a:defRPr sz="1300" b="1">
+                <a:solidFill>
+                  <a:srgbClr val="0284C7"/>
+                </a:solidFill>
+              </a:defRPr>
+            </a:pPr>
+            <a:r>
+              <a:t>Verification Metrics &amp; Execution Health</a:t>
+            </a:r>
+          </a:p>
+          <a:p>
+            <a:pPr>
+              <a:spcBef>
+                <a:spcPts val="400"/>
+              </a:spcBef>
+              <a:defRPr sz="1050">
+                <a:solidFill>
+                  <a:srgbClr val="0F172A"/>
+                </a:solidFill>
+              </a:defRPr>
+            </a:pPr>
+            <a:r>
+              <a:t>• Execution Time: 2.41 seconds across entire test suite.</a:t>
+            </a:r>
+          </a:p>
+          <a:p>
+            <a:pPr>
+              <a:spcBef>
+                <a:spcPts val="400"/>
+              </a:spcBef>
+              <a:defRPr sz="1050">
+                <a:solidFill>
+                  <a:srgbClr val="0F172A"/>
+                </a:solidFill>
+              </a:defRPr>
+            </a:pPr>
+            <a:r>
+              <a:t>• Pass Rate: 100.0% (18 passed, 0 failed, 0 broken).</a:t>
+            </a:r>
+          </a:p>
+          <a:p>
+            <a:pPr>
+              <a:spcBef>
+                <a:spcPts val="400"/>
+              </a:spcBef>
+              <a:defRPr sz="1050">
+                <a:solidFill>
+                  <a:srgbClr val="0F172A"/>
+                </a:solidFill>
+              </a:defRPr>
+            </a:pPr>
+            <a:r>
+              <a:t>• Zero unhandled exceptions or connection drops.</a:t>
+            </a:r>
+          </a:p>
+          <a:p>
+            <a:pPr>
+              <a:spcBef>
+                <a:spcPts val="400"/>
+              </a:spcBef>
+              <a:defRPr sz="1050">
+                <a:solidFill>
+                  <a:srgbClr val="0F172A"/>
+                </a:solidFill>
+              </a:defRPr>
+            </a:pPr>
+            <a:r>
+              <a:t>• In-memory test client ensures deterministic execution without external port collisions.</a:t>
+            </a:r>
+          </a:p>
+        </p:txBody>
+      </p:sp>
+    </p:spTree>
+  </p:cSld>
+  <p:clrMapOvr>
+    <a:masterClrMapping/>
+  </p:clrMapOvr>
+</p:sld>
+</file>
+
+<file path=ppt/slides/slide13.xml><?xml version="1.0" encoding="utf-8"?>
+<p:sld xmlns:a="http://schemas.openxmlformats.org/drawingml/2006/main" xmlns:p="http://schemas.openxmlformats.org/presentationml/2006/main" xmlns:r="http://schemas.openxmlformats.org/officeDocument/2006/relationships">
+  <p:cSld>
+    <p:spTree>
+      <p:nvGrpSpPr>
+        <p:cNvPr id="1" name=""/>
+        <p:cNvGrpSpPr/>
+        <p:nvPr/>
+      </p:nvGrpSpPr>
+      <p:grpSpPr/>
+      <p:sp>
+        <p:nvSpPr>
+          <p:cNvPr id="2" name="TextBox 1"/>
+          <p:cNvSpPr txBox="1"/>
+          <p:nvPr/>
+        </p:nvSpPr>
+        <p:spPr>
+          <a:xfrm>
+            <a:off x="731520" y="457200"/>
+            <a:ext cx="10728655" cy="1005840"/>
+          </a:xfrm>
+          <a:prstGeom prst="rect">
+            <a:avLst/>
+          </a:prstGeom>
+          <a:noFill/>
+        </p:spPr>
+        <p:txBody>
+          <a:bodyPr wrap="square">
+            <a:spAutoFit/>
+          </a:bodyPr>
+          <a:lstStyle/>
+          <a:p>
+            <a:pPr>
+              <a:defRPr sz="1000" b="1">
+                <a:solidFill>
+                  <a:srgbClr val="0284C7"/>
+                </a:solidFill>
+              </a:defRPr>
+            </a:pPr>
+            <a:r>
+              <a:t>PROJECT-001 • FINAL YEAR ENGINEERING PROJECT</a:t>
+            </a:r>
+          </a:p>
+          <a:p>
+            <a:pPr>
+              <a:defRPr sz="2200" b="1">
+                <a:solidFill>
+                  <a:srgbClr val="0F172A"/>
+                </a:solidFill>
+              </a:defRPr>
+            </a:pPr>
+            <a:r>
+              <a:t>12. Demonstration Walkthrough Video Deliverable</a:t>
+            </a:r>
+          </a:p>
+        </p:txBody>
+      </p:sp>
+      <p:sp>
+        <p:nvSpPr>
+          <p:cNvPr id="3" name="Rectangle 2"/>
+          <p:cNvSpPr/>
+          <p:nvPr/>
+        </p:nvSpPr>
+        <p:spPr>
+          <a:xfrm>
+            <a:off x="731520" y="1645920"/>
+            <a:ext cx="5120640" cy="4572000"/>
+          </a:xfrm>
+          <a:prstGeom prst="rect">
+            <a:avLst/>
+          </a:prstGeom>
+          <a:solidFill>
+            <a:srgbClr val="FFFFFF"/>
+          </a:solidFill>
+          <a:ln>
+            <a:solidFill>
+              <a:srgbClr val="E2E8F0"/>
+            </a:solidFill>
+          </a:ln>
+        </p:spPr>
+        <p:style>
+          <a:lnRef idx="1">
+            <a:schemeClr val="accent1"/>
+          </a:lnRef>
+          <a:fillRef idx="3">
+            <a:schemeClr val="accent1"/>
+          </a:fillRef>
+          <a:effectRef idx="2">
+            <a:schemeClr val="accent1"/>
+          </a:effectRef>
+          <a:fontRef idx="minor">
+            <a:schemeClr val="lt1"/>
+          </a:fontRef>
+        </p:style>
+        <p:txBody>
+          <a:bodyPr rtlCol="0" anchor="ctr"/>
+          <a:lstStyle/>
+          <a:p>
+            <a:pPr algn="ctr"/>
+          </a:p>
+        </p:txBody>
+      </p:sp>
+      <p:sp>
+        <p:nvSpPr>
+          <p:cNvPr id="4" name="TextBox 3"/>
+          <p:cNvSpPr txBox="1"/>
+          <p:nvPr/>
+        </p:nvSpPr>
+        <p:spPr>
+          <a:xfrm>
+            <a:off x="914400" y="1783080"/>
+            <a:ext cx="4754880" cy="4297680"/>
+          </a:xfrm>
+          <a:prstGeom prst="rect">
+            <a:avLst/>
+          </a:prstGeom>
+          <a:noFill/>
+        </p:spPr>
+        <p:txBody>
+          <a:bodyPr wrap="square">
+            <a:spAutoFit/>
+          </a:bodyPr>
+          <a:lstStyle/>
+          <a:p>
+            <a:pPr>
+              <a:defRPr sz="1300" b="1">
+                <a:solidFill>
+                  <a:srgbClr val="0284C7"/>
+                </a:solidFill>
+              </a:defRPr>
+            </a:pPr>
+            <a:r>
+              <a:t>Video Recording Specifications</a:t>
+            </a:r>
+          </a:p>
+          <a:p>
+            <a:pPr>
+              <a:spcBef>
+                <a:spcPts val="400"/>
+              </a:spcBef>
+              <a:defRPr sz="1050">
+                <a:solidFill>
+                  <a:srgbClr val="0F172A"/>
+                </a:solidFill>
+              </a:defRPr>
+            </a:pPr>
+            <a:r>
+              <a:t>• File Path: walkthrough/walkthrough_video.mp4</a:t>
+            </a:r>
+          </a:p>
+          <a:p>
+            <a:pPr>
+              <a:spcBef>
+                <a:spcPts val="400"/>
+              </a:spcBef>
+              <a:defRPr sz="1050">
+                <a:solidFill>
+                  <a:srgbClr val="0F172A"/>
+                </a:solidFill>
+              </a:defRPr>
+            </a:pPr>
+            <a:r>
+              <a:t>• Resolution: 1280x800 High-Definition Progressive Video</a:t>
+            </a:r>
+          </a:p>
+          <a:p>
+            <a:pPr>
+              <a:spcBef>
+                <a:spcPts val="400"/>
+              </a:spcBef>
+              <a:defRPr sz="1050">
+                <a:solidFill>
+                  <a:srgbClr val="0F172A"/>
+                </a:solidFill>
+              </a:defRPr>
+            </a:pPr>
+            <a:r>
+              <a:t>• Codec: H.264 (High Profile, Level 4.0, YUV420p)</a:t>
+            </a:r>
+          </a:p>
+          <a:p>
+            <a:pPr>
+              <a:spcBef>
+                <a:spcPts val="400"/>
+              </a:spcBef>
+              <a:defRPr sz="1050">
+                <a:solidFill>
+                  <a:srgbClr val="0F172A"/>
+                </a:solidFill>
+              </a:defRPr>
+            </a:pPr>
+            <a:r>
+              <a:t>• Duration: 02:37 (157.0 seconds, exactly meeting 2:30-3:30 target)</a:t>
+            </a:r>
+          </a:p>
+          <a:p>
+            <a:pPr>
+              <a:spcBef>
+                <a:spcPts val="400"/>
+              </a:spcBef>
+              <a:defRPr sz="1050">
+                <a:solidFill>
+                  <a:srgbClr val="0F172A"/>
+                </a:solidFill>
+              </a:defRPr>
+            </a:pPr>
+            <a:r>
+              <a:t>• File Size: 1.55 MB (1,622,913 bytes, verified non-zero &amp; playable)</a:t>
+            </a:r>
+          </a:p>
+          <a:p>
+            <a:pPr>
+              <a:spcBef>
+                <a:spcPts val="400"/>
+              </a:spcBef>
+              <a:defRPr sz="1050">
+                <a:solidFill>
+                  <a:srgbClr val="0F172A"/>
+                </a:solidFill>
+              </a:defRPr>
+            </a:pPr>
+            <a:r>
+              <a:t>• Demonstration Flow: 9-segment full user journey with zero simulated filler.</a:t>
+            </a:r>
+          </a:p>
+        </p:txBody>
+      </p:sp>
+      <p:sp>
+        <p:nvSpPr>
+          <p:cNvPr id="5" name="Rectangle 4"/>
+          <p:cNvSpPr/>
+          <p:nvPr/>
+        </p:nvSpPr>
+        <p:spPr>
+          <a:xfrm>
+            <a:off x="6217920" y="1645920"/>
+            <a:ext cx="5212080" cy="4572000"/>
+          </a:xfrm>
+          <a:prstGeom prst="rect">
+            <a:avLst/>
+          </a:prstGeom>
+          <a:solidFill>
+            <a:srgbClr val="FFFFFF"/>
+          </a:solidFill>
+          <a:ln>
+            <a:solidFill>
+              <a:srgbClr val="E2E8F0"/>
+            </a:solidFill>
+          </a:ln>
+        </p:spPr>
+        <p:style>
+          <a:lnRef idx="1">
+            <a:schemeClr val="accent1"/>
+          </a:lnRef>
+          <a:fillRef idx="3">
+            <a:schemeClr val="accent1"/>
+          </a:fillRef>
+          <a:effectRef idx="2">
+            <a:schemeClr val="accent1"/>
+          </a:effectRef>
+          <a:fontRef idx="minor">
+            <a:schemeClr val="lt1"/>
+          </a:fontRef>
+        </p:style>
+        <p:txBody>
+          <a:bodyPr rtlCol="0" anchor="ctr"/>
+          <a:lstStyle/>
+          <a:p>
+            <a:pPr algn="ctr"/>
+          </a:p>
+        </p:txBody>
+      </p:sp>
+      <p:sp>
+        <p:nvSpPr>
+          <p:cNvPr id="6" name="TextBox 5"/>
+          <p:cNvSpPr txBox="1"/>
+          <p:nvPr/>
+        </p:nvSpPr>
+        <p:spPr>
+          <a:xfrm>
+            <a:off x="6400800" y="1783080"/>
+            <a:ext cx="4846320" cy="4297680"/>
+          </a:xfrm>
+          <a:prstGeom prst="rect">
+            <a:avLst/>
+          </a:prstGeom>
+          <a:noFill/>
+        </p:spPr>
+        <p:txBody>
+          <a:bodyPr wrap="square">
+            <a:spAutoFit/>
+          </a:bodyPr>
+          <a:lstStyle/>
+          <a:p>
+            <a:pPr>
+              <a:defRPr sz="1300" b="1">
+                <a:solidFill>
+                  <a:srgbClr val="0284C7"/>
+                </a:solidFill>
+              </a:defRPr>
+            </a:pPr>
+            <a:r>
+              <a:t>Synchronized Documentation</a:t>
+            </a:r>
+          </a:p>
+          <a:p>
+            <a:pPr>
+              <a:spcBef>
+                <a:spcPts val="400"/>
+              </a:spcBef>
+              <a:defRPr sz="1050">
+                <a:solidFill>
+                  <a:srgbClr val="0F172A"/>
+                </a:solidFill>
+              </a:defRPr>
+            </a:pPr>
+            <a:r>
+              <a:t>• walkthrough_timestamps.md: Exact second-by-second timestamps corresponding to video playback.</a:t>
+            </a:r>
+          </a:p>
+          <a:p>
+            <a:pPr>
+              <a:spcBef>
+                <a:spcPts val="400"/>
+              </a:spcBef>
+              <a:defRPr sz="1050">
+                <a:solidFill>
+                  <a:srgbClr val="0F172A"/>
+                </a:solidFill>
+              </a:defRPr>
+            </a:pPr>
+            <a:r>
+              <a:t>• walkthrough_script.md: Complete narration script detailing each user action.</a:t>
+            </a:r>
+          </a:p>
+          <a:p>
+            <a:pPr>
+              <a:spcBef>
+                <a:spcPts val="400"/>
+              </a:spcBef>
+              <a:defRPr sz="1050">
+                <a:solidFill>
+                  <a:srgbClr val="0F172A"/>
+                </a:solidFill>
+              </a:defRPr>
+            </a:pPr>
+            <a:r>
+              <a:t>• VIDEO_RECORDING_TRACKER.xlsx: Updated to status RECORDED.</a:t>
+            </a:r>
+          </a:p>
+          <a:p>
+            <a:pPr>
+              <a:spcBef>
+                <a:spcPts val="400"/>
+              </a:spcBef>
+              <a:defRPr sz="1050">
+                <a:solidFill>
+                  <a:srgbClr val="0F172A"/>
+                </a:solidFill>
+              </a:defRPr>
+            </a:pPr>
+            <a:r>
+              <a:t>• Verified playable via ffmpeg media stream probe.</a:t>
+            </a:r>
+          </a:p>
+        </p:txBody>
+      </p:sp>
+    </p:spTree>
+  </p:cSld>
+  <p:clrMapOvr>
+    <a:masterClrMapping/>
+  </p:clrMapOvr>
+</p:sld>
+</file>
+
+<file path=ppt/slides/slide14.xml><?xml version="1.0" encoding="utf-8"?>
+<p:sld xmlns:a="http://schemas.openxmlformats.org/drawingml/2006/main" xmlns:p="http://schemas.openxmlformats.org/presentationml/2006/main" xmlns:r="http://schemas.openxmlformats.org/officeDocument/2006/relationships">
+  <p:cSld>
+    <p:spTree>
+      <p:nvGrpSpPr>
+        <p:cNvPr id="1" name=""/>
+        <p:cNvGrpSpPr/>
+        <p:nvPr/>
+      </p:nvGrpSpPr>
+      <p:grpSpPr/>
+      <p:sp>
+        <p:nvSpPr>
+          <p:cNvPr id="2" name="TextBox 1"/>
+          <p:cNvSpPr txBox="1"/>
+          <p:nvPr/>
+        </p:nvSpPr>
+        <p:spPr>
+          <a:xfrm>
+            <a:off x="731520" y="457200"/>
+            <a:ext cx="10728655" cy="1005840"/>
+          </a:xfrm>
+          <a:prstGeom prst="rect">
+            <a:avLst/>
+          </a:prstGeom>
+          <a:noFill/>
+        </p:spPr>
+        <p:txBody>
+          <a:bodyPr wrap="square">
+            <a:spAutoFit/>
+          </a:bodyPr>
+          <a:lstStyle/>
+          <a:p>
+            <a:pPr>
+              <a:defRPr sz="1000" b="1">
+                <a:solidFill>
+                  <a:srgbClr val="0284C7"/>
+                </a:solidFill>
+              </a:defRPr>
+            </a:pPr>
+            <a:r>
+              <a:t>PROJECT-001 • FINAL YEAR ENGINEERING PROJECT</a:t>
+            </a:r>
+          </a:p>
+          <a:p>
+            <a:pPr>
+              <a:defRPr sz="2200" b="1">
+                <a:solidFill>
+                  <a:srgbClr val="0F172A"/>
+                </a:solidFill>
+              </a:defRPr>
+            </a:pPr>
+            <a:r>
+              <a:t>13. Limitations &amp; Future Research Directions</a:t>
+            </a:r>
+          </a:p>
+        </p:txBody>
+      </p:sp>
+      <p:sp>
+        <p:nvSpPr>
+          <p:cNvPr id="3" name="Rectangle 2"/>
+          <p:cNvSpPr/>
+          <p:nvPr/>
+        </p:nvSpPr>
+        <p:spPr>
+          <a:xfrm>
+            <a:off x="731520" y="1645920"/>
+            <a:ext cx="5120640" cy="4572000"/>
+          </a:xfrm>
+          <a:prstGeom prst="rect">
+            <a:avLst/>
+          </a:prstGeom>
+          <a:solidFill>
+            <a:srgbClr val="FFFFFF"/>
+          </a:solidFill>
+          <a:ln>
+            <a:solidFill>
+              <a:srgbClr val="E2E8F0"/>
+            </a:solidFill>
+          </a:ln>
+        </p:spPr>
+        <p:style>
+          <a:lnRef idx="1">
+            <a:schemeClr val="accent1"/>
+          </a:lnRef>
+          <a:fillRef idx="3">
+            <a:schemeClr val="accent1"/>
+          </a:fillRef>
+          <a:effectRef idx="2">
+            <a:schemeClr val="accent1"/>
+          </a:effectRef>
+          <a:fontRef idx="minor">
+            <a:schemeClr val="lt1"/>
+          </a:fontRef>
+        </p:style>
+        <p:txBody>
+          <a:bodyPr rtlCol="0" anchor="ctr"/>
+          <a:lstStyle/>
+          <a:p>
+            <a:pPr algn="ctr"/>
+          </a:p>
+        </p:txBody>
+      </p:sp>
+      <p:sp>
+        <p:nvSpPr>
+          <p:cNvPr id="4" name="TextBox 3"/>
+          <p:cNvSpPr txBox="1"/>
+          <p:nvPr/>
+        </p:nvSpPr>
+        <p:spPr>
+          <a:xfrm>
+            <a:off x="914400" y="1783080"/>
+            <a:ext cx="4754880" cy="4297680"/>
+          </a:xfrm>
+          <a:prstGeom prst="rect">
+            <a:avLst/>
+          </a:prstGeom>
+          <a:noFill/>
+        </p:spPr>
+        <p:txBody>
+          <a:bodyPr wrap="square">
+            <a:spAutoFit/>
+          </a:bodyPr>
+          <a:lstStyle/>
+          <a:p>
+            <a:pPr>
+              <a:defRPr sz="1300" b="1">
+                <a:solidFill>
+                  <a:srgbClr val="0284C7"/>
+                </a:solidFill>
+              </a:defRPr>
+            </a:pPr>
+            <a:r>
+              <a:t>Current System Limitations</a:t>
+            </a:r>
+          </a:p>
+          <a:p>
+            <a:pPr>
+              <a:spcBef>
+                <a:spcPts val="400"/>
+              </a:spcBef>
+              <a:defRPr sz="1050">
+                <a:solidFill>
+                  <a:srgbClr val="0F172A"/>
+                </a:solidFill>
+              </a:defRPr>
+            </a:pPr>
+            <a:r>
+              <a:t>• Dataset is scoped to Indian domestic air corridors (Bangalore, Delhi, Mumbai, Kolkata, Chennai).</a:t>
+            </a:r>
+          </a:p>
+          <a:p>
+            <a:pPr>
+              <a:spcBef>
+                <a:spcPts val="400"/>
+              </a:spcBef>
+              <a:defRPr sz="1050">
+                <a:solidFill>
+                  <a:srgbClr val="0F172A"/>
+                </a:solidFill>
+              </a:defRPr>
+            </a:pPr>
+            <a:r>
+              <a:t>• Real-time seasonal weather disruptions (fog delays, monsoons) are not dynamically integrated into the pricing vector.</a:t>
+            </a:r>
+          </a:p>
+          <a:p>
+            <a:pPr>
+              <a:spcBef>
+                <a:spcPts val="400"/>
+              </a:spcBef>
+              <a:defRPr sz="1050">
+                <a:solidFill>
+                  <a:srgbClr val="0F172A"/>
+                </a:solidFill>
+              </a:defRPr>
+            </a:pPr>
+            <a:r>
+              <a:t>• Inflight ancillary charges (seat selection, extra baggage) are not included in base fare predictions.</a:t>
+            </a:r>
+          </a:p>
+        </p:txBody>
+      </p:sp>
+      <p:sp>
+        <p:nvSpPr>
+          <p:cNvPr id="5" name="Rectangle 4"/>
+          <p:cNvSpPr/>
+          <p:nvPr/>
+        </p:nvSpPr>
+        <p:spPr>
+          <a:xfrm>
+            <a:off x="6217920" y="1645920"/>
+            <a:ext cx="5212080" cy="4572000"/>
+          </a:xfrm>
+          <a:prstGeom prst="rect">
+            <a:avLst/>
+          </a:prstGeom>
+          <a:solidFill>
+            <a:srgbClr val="FFFFFF"/>
+          </a:solidFill>
+          <a:ln>
+            <a:solidFill>
+              <a:srgbClr val="E2E8F0"/>
+            </a:solidFill>
+          </a:ln>
+        </p:spPr>
+        <p:style>
+          <a:lnRef idx="1">
+            <a:schemeClr val="accent1"/>
+          </a:lnRef>
+          <a:fillRef idx="3">
+            <a:schemeClr val="accent1"/>
+          </a:fillRef>
+          <a:effectRef idx="2">
+            <a:schemeClr val="accent1"/>
+          </a:effectRef>
+          <a:fontRef idx="minor">
+            <a:schemeClr val="lt1"/>
+          </a:fontRef>
+        </p:style>
+        <p:txBody>
+          <a:bodyPr rtlCol="0" anchor="ctr"/>
+          <a:lstStyle/>
+          <a:p>
+            <a:pPr algn="ctr"/>
+          </a:p>
+        </p:txBody>
+      </p:sp>
+      <p:sp>
+        <p:nvSpPr>
+          <p:cNvPr id="6" name="TextBox 5"/>
+          <p:cNvSpPr txBox="1"/>
+          <p:nvPr/>
+        </p:nvSpPr>
+        <p:spPr>
+          <a:xfrm>
+            <a:off x="6400800" y="1783080"/>
+            <a:ext cx="4846320" cy="4297680"/>
+          </a:xfrm>
+          <a:prstGeom prst="rect">
+            <a:avLst/>
+          </a:prstGeom>
+          <a:noFill/>
+        </p:spPr>
+        <p:txBody>
+          <a:bodyPr wrap="square">
+            <a:spAutoFit/>
+          </a:bodyPr>
+          <a:lstStyle/>
+          <a:p>
+            <a:pPr>
+              <a:defRPr sz="1300" b="1">
+                <a:solidFill>
+                  <a:srgbClr val="0284C7"/>
+                </a:solidFill>
+              </a:defRPr>
+            </a:pPr>
+            <a:r>
+              <a:t>Future Research &amp; Scaling</a:t>
+            </a:r>
+          </a:p>
+          <a:p>
+            <a:pPr>
+              <a:spcBef>
+                <a:spcPts val="400"/>
+              </a:spcBef>
+              <a:defRPr sz="1050">
+                <a:solidFill>
+                  <a:srgbClr val="0F172A"/>
+                </a:solidFill>
+              </a:defRPr>
+            </a:pPr>
+            <a:r>
+              <a:t>• Integrate live Amadeus / Skyscanner Flight Search APIs for real-time live market pricing.</a:t>
+            </a:r>
+          </a:p>
+          <a:p>
+            <a:pPr>
+              <a:spcBef>
+                <a:spcPts val="400"/>
+              </a:spcBef>
+              <a:defRPr sz="1050">
+                <a:solidFill>
+                  <a:srgbClr val="0F172A"/>
+                </a:solidFill>
+              </a:defRPr>
+            </a:pPr>
+            <a:r>
+              <a:t>• Implement Attention-based Transformer models (e.g. Temporal Fusion Transformers) for multi-horizon price curves.</a:t>
+            </a:r>
+          </a:p>
+          <a:p>
+            <a:pPr>
+              <a:spcBef>
+                <a:spcPts val="400"/>
+              </a:spcBef>
+              <a:defRPr sz="1050">
+                <a:solidFill>
+                  <a:srgbClr val="0F172A"/>
+                </a:solidFill>
+              </a:defRPr>
+            </a:pPr>
+            <a:r>
+              <a:t>• Deploy mobile native interface using Flutter for on-the-go flight booking alerts.</a:t>
+            </a:r>
+          </a:p>
+          <a:p>
+            <a:pPr>
+              <a:spcBef>
+                <a:spcPts val="400"/>
+              </a:spcBef>
+              <a:defRPr sz="1050">
+                <a:solidFill>
+                  <a:srgbClr val="0F172A"/>
+                </a:solidFill>
+              </a:defRPr>
+            </a:pPr>
+            <a:r>
+              <a:t>• Incorporate sentiment analysis of global fuel price trends to refine macro pricing estimates.</a:t>
+            </a:r>
+          </a:p>
+        </p:txBody>
+      </p:sp>
+    </p:spTree>
+  </p:cSld>
+  <p:clrMapOvr>
+    <a:masterClrMapping/>
+  </p:clrMapOvr>
+</p:sld>
+</file>
+
+<file path=ppt/slides/slide15.xml><?xml version="1.0" encoding="utf-8"?>
+<p:sld xmlns:a="http://schemas.openxmlformats.org/drawingml/2006/main" xmlns:p="http://schemas.openxmlformats.org/presentationml/2006/main" xmlns:r="http://schemas.openxmlformats.org/officeDocument/2006/relationships">
+  <p:cSld>
+    <p:spTree>
+      <p:nvGrpSpPr>
+        <p:cNvPr id="1" name=""/>
+        <p:cNvGrpSpPr/>
+        <p:nvPr/>
+      </p:nvGrpSpPr>
+      <p:grpSpPr/>
+      <p:sp>
+        <p:nvSpPr>
+          <p:cNvPr id="2" name="TextBox 1"/>
+          <p:cNvSpPr txBox="1"/>
+          <p:nvPr/>
+        </p:nvSpPr>
+        <p:spPr>
+          <a:xfrm>
+            <a:off x="731520" y="457200"/>
+            <a:ext cx="10728655" cy="1005840"/>
+          </a:xfrm>
+          <a:prstGeom prst="rect">
+            <a:avLst/>
+          </a:prstGeom>
+          <a:noFill/>
+        </p:spPr>
+        <p:txBody>
+          <a:bodyPr wrap="square">
+            <a:spAutoFit/>
+          </a:bodyPr>
+          <a:lstStyle/>
+          <a:p>
+            <a:pPr>
+              <a:defRPr sz="1000" b="1">
+                <a:solidFill>
+                  <a:srgbClr val="0284C7"/>
+                </a:solidFill>
+              </a:defRPr>
+            </a:pPr>
+            <a:r>
+              <a:t>PROJECT-001 • FINAL YEAR ENGINEERING PROJECT</a:t>
+            </a:r>
+          </a:p>
+          <a:p>
+            <a:pPr>
+              <a:defRPr sz="2200" b="1">
+                <a:solidFill>
+                  <a:srgbClr val="0F172A"/>
+                </a:solidFill>
+              </a:defRPr>
+            </a:pPr>
+            <a:r>
+              <a:t>14. Conclusion &amp; Academic References</a:t>
+            </a:r>
+          </a:p>
+        </p:txBody>
+      </p:sp>
+      <p:sp>
+        <p:nvSpPr>
+          <p:cNvPr id="3" name="Rectangle 2"/>
+          <p:cNvSpPr/>
+          <p:nvPr/>
+        </p:nvSpPr>
+        <p:spPr>
+          <a:xfrm>
+            <a:off x="731520" y="1645920"/>
+            <a:ext cx="5120640" cy="4572000"/>
+          </a:xfrm>
+          <a:prstGeom prst="rect">
+            <a:avLst/>
+          </a:prstGeom>
+          <a:solidFill>
+            <a:srgbClr val="FFFFFF"/>
+          </a:solidFill>
+          <a:ln>
+            <a:solidFill>
+              <a:srgbClr val="E2E8F0"/>
+            </a:solidFill>
+          </a:ln>
+        </p:spPr>
+        <p:style>
+          <a:lnRef idx="1">
+            <a:schemeClr val="accent1"/>
+          </a:lnRef>
+          <a:fillRef idx="3">
+            <a:schemeClr val="accent1"/>
+          </a:fillRef>
+          <a:effectRef idx="2">
+            <a:schemeClr val="accent1"/>
+          </a:effectRef>
+          <a:fontRef idx="minor">
+            <a:schemeClr val="lt1"/>
+          </a:fontRef>
+        </p:style>
+        <p:txBody>
+          <a:bodyPr rtlCol="0" anchor="ctr"/>
+          <a:lstStyle/>
+          <a:p>
+            <a:pPr algn="ctr"/>
+          </a:p>
+        </p:txBody>
+      </p:sp>
+      <p:sp>
+        <p:nvSpPr>
+          <p:cNvPr id="4" name="TextBox 3"/>
+          <p:cNvSpPr txBox="1"/>
+          <p:nvPr/>
+        </p:nvSpPr>
+        <p:spPr>
+          <a:xfrm>
+            <a:off x="914400" y="1783080"/>
+            <a:ext cx="4754880" cy="4297680"/>
+          </a:xfrm>
+          <a:prstGeom prst="rect">
+            <a:avLst/>
+          </a:prstGeom>
+          <a:noFill/>
+        </p:spPr>
+        <p:txBody>
+          <a:bodyPr wrap="square">
+            <a:spAutoFit/>
+          </a:bodyPr>
+          <a:lstStyle/>
+          <a:p>
+            <a:pPr>
+              <a:defRPr sz="1300" b="1">
+                <a:solidFill>
+                  <a:srgbClr val="0284C7"/>
+                </a:solidFill>
+              </a:defRPr>
+            </a:pPr>
+            <a:r>
+              <a:t>Final Project Conclusion</a:t>
+            </a:r>
+          </a:p>
+          <a:p>
+            <a:pPr>
+              <a:spcBef>
+                <a:spcPts val="400"/>
+              </a:spcBef>
+              <a:defRPr sz="1050">
+                <a:solidFill>
+                  <a:srgbClr val="0F172A"/>
+                </a:solidFill>
+              </a:defRPr>
+            </a:pPr>
+            <a:r>
+              <a:t>• Successfully developed and validated a full-stack flight price prediction system.</a:t>
+            </a:r>
+          </a:p>
+          <a:p>
+            <a:pPr>
+              <a:spcBef>
+                <a:spcPts val="400"/>
+              </a:spcBef>
+              <a:defRPr sz="1050">
+                <a:solidFill>
+                  <a:srgbClr val="0F172A"/>
+                </a:solidFill>
+              </a:defRPr>
+            </a:pPr>
+            <a:r>
+              <a:t>• Combined PyTorch Bidirectional LSTM neural networks with Random Forest ensemble learning.</a:t>
+            </a:r>
+          </a:p>
+          <a:p>
+            <a:pPr>
+              <a:spcBef>
+                <a:spcPts val="400"/>
+              </a:spcBef>
+              <a:defRPr sz="1050">
+                <a:solidFill>
+                  <a:srgbClr val="0F172A"/>
+                </a:solidFill>
+              </a:defRPr>
+            </a:pPr>
+            <a:r>
+              <a:t>• Achieved strong empirical accuracy (R² = 0.8321 RF, R² = 0.7566 LSTM, MAE = ₹1,136).</a:t>
+            </a:r>
+          </a:p>
+          <a:p>
+            <a:pPr>
+              <a:spcBef>
+                <a:spcPts val="400"/>
+              </a:spcBef>
+              <a:defRPr sz="1050">
+                <a:solidFill>
+                  <a:srgbClr val="0F172A"/>
+                </a:solidFill>
+              </a:defRPr>
+            </a:pPr>
+            <a:r>
+              <a:t>• Delivered 100% complete software assets: FastAPI backend, web frontend, SQLite persistence, automated tests, and 2m 37s video demo.</a:t>
+            </a:r>
+          </a:p>
+        </p:txBody>
+      </p:sp>
+      <p:sp>
+        <p:nvSpPr>
+          <p:cNvPr id="5" name="Rectangle 4"/>
+          <p:cNvSpPr/>
+          <p:nvPr/>
+        </p:nvSpPr>
+        <p:spPr>
+          <a:xfrm>
+            <a:off x="6217920" y="1645920"/>
+            <a:ext cx="5212080" cy="4572000"/>
+          </a:xfrm>
+          <a:prstGeom prst="rect">
+            <a:avLst/>
+          </a:prstGeom>
+          <a:solidFill>
+            <a:srgbClr val="FFFFFF"/>
+          </a:solidFill>
+          <a:ln>
+            <a:solidFill>
+              <a:srgbClr val="E2E8F0"/>
+            </a:solidFill>
+          </a:ln>
+        </p:spPr>
+        <p:style>
+          <a:lnRef idx="1">
+            <a:schemeClr val="accent1"/>
+          </a:lnRef>
+          <a:fillRef idx="3">
+            <a:schemeClr val="accent1"/>
+          </a:fillRef>
+          <a:effectRef idx="2">
+            <a:schemeClr val="accent1"/>
+          </a:effectRef>
+          <a:fontRef idx="minor">
+            <a:schemeClr val="lt1"/>
+          </a:fontRef>
+        </p:style>
+        <p:txBody>
+          <a:bodyPr rtlCol="0" anchor="ctr"/>
+          <a:lstStyle/>
+          <a:p>
+            <a:pPr algn="ctr"/>
+          </a:p>
+        </p:txBody>
+      </p:sp>
+      <p:sp>
+        <p:nvSpPr>
+          <p:cNvPr id="6" name="TextBox 5"/>
+          <p:cNvSpPr txBox="1"/>
+          <p:nvPr/>
+        </p:nvSpPr>
+        <p:spPr>
+          <a:xfrm>
+            <a:off x="6400800" y="1783080"/>
+            <a:ext cx="4846320" cy="4297680"/>
+          </a:xfrm>
+          <a:prstGeom prst="rect">
+            <a:avLst/>
+          </a:prstGeom>
+          <a:noFill/>
+        </p:spPr>
+        <p:txBody>
+          <a:bodyPr wrap="square">
+            <a:spAutoFit/>
+          </a:bodyPr>
+          <a:lstStyle/>
+          <a:p>
+            <a:pPr>
+              <a:defRPr sz="1300" b="1">
+                <a:solidFill>
+                  <a:srgbClr val="0284C7"/>
+                </a:solidFill>
+              </a:defRPr>
+            </a:pPr>
+            <a:r>
+              <a:t>Key Academic References</a:t>
+            </a:r>
+          </a:p>
+          <a:p>
+            <a:pPr>
+              <a:spcBef>
+                <a:spcPts val="400"/>
+              </a:spcBef>
+              <a:defRPr sz="1050">
+                <a:solidFill>
+                  <a:srgbClr val="0F172A"/>
+                </a:solidFill>
+              </a:defRPr>
+            </a:pPr>
+            <a:r>
+              <a:t>• 1. Hochreiter &amp; Schmidhuber, "Long Short-Term Memory", Neural Computation, 1997.</a:t>
+            </a:r>
+          </a:p>
+          <a:p>
+            <a:pPr>
+              <a:spcBef>
+                <a:spcPts val="400"/>
+              </a:spcBef>
+              <a:defRPr sz="1050">
+                <a:solidFill>
+                  <a:srgbClr val="0F172A"/>
+                </a:solidFill>
+              </a:defRPr>
+            </a:pPr>
+            <a:r>
+              <a:t>• 2. Breiman, "Random Forests", Machine Learning, 2001.</a:t>
+            </a:r>
+          </a:p>
+          <a:p>
+            <a:pPr>
+              <a:spcBef>
+                <a:spcPts val="400"/>
+              </a:spcBef>
+              <a:defRPr sz="1050">
+                <a:solidFill>
+                  <a:srgbClr val="0F172A"/>
+                </a:solidFill>
+              </a:defRPr>
+            </a:pPr>
+            <a:r>
+              <a:t>• 3. Kaggle Flight Ticket Price Dataset (10,683 observations).</a:t>
+            </a:r>
+          </a:p>
+          <a:p>
+            <a:pPr>
+              <a:spcBef>
+                <a:spcPts val="400"/>
+              </a:spcBef>
+              <a:defRPr sz="1050">
+                <a:solidFill>
+                  <a:srgbClr val="0F172A"/>
+                </a:solidFill>
+              </a:defRPr>
+            </a:pPr>
+            <a:r>
+              <a:t>• 4. FastAPI &amp; PyTorch Documentation (2024-2026).</a:t>
             </a:r>
           </a:p>
         </p:txBody>
@@ -3223,23 +5085,72 @@
       <p:grpSpPr/>
       <p:sp>
         <p:nvSpPr>
-          <p:cNvPr id="2" name="Rectangle 1"/>
+          <p:cNvPr id="2" name="TextBox 1"/>
+          <p:cNvSpPr txBox="1"/>
+          <p:nvPr/>
+        </p:nvSpPr>
+        <p:spPr>
+          <a:xfrm>
+            <a:off x="731520" y="457200"/>
+            <a:ext cx="10728655" cy="1005840"/>
+          </a:xfrm>
+          <a:prstGeom prst="rect">
+            <a:avLst/>
+          </a:prstGeom>
+          <a:noFill/>
+        </p:spPr>
+        <p:txBody>
+          <a:bodyPr wrap="square">
+            <a:spAutoFit/>
+          </a:bodyPr>
+          <a:lstStyle/>
+          <a:p>
+            <a:pPr>
+              <a:defRPr sz="1000" b="1">
+                <a:solidFill>
+                  <a:srgbClr val="0284C7"/>
+                </a:solidFill>
+              </a:defRPr>
+            </a:pPr>
+            <a:r>
+              <a:t>PROJECT-001 • FINAL YEAR ENGINEERING PROJECT</a:t>
+            </a:r>
+          </a:p>
+          <a:p>
+            <a:pPr>
+              <a:defRPr sz="2200" b="1">
+                <a:solidFill>
+                  <a:srgbClr val="0F172A"/>
+                </a:solidFill>
+              </a:defRPr>
+            </a:pPr>
+            <a:r>
+              <a:t>1. Problem Statement &amp; Industrial Motivation</a:t>
+            </a:r>
+          </a:p>
+        </p:txBody>
+      </p:sp>
+      <p:sp>
+        <p:nvSpPr>
+          <p:cNvPr id="3" name="Rectangle 2"/>
           <p:cNvSpPr/>
           <p:nvPr/>
         </p:nvSpPr>
         <p:spPr>
           <a:xfrm>
-            <a:off x="0" y="0"/>
-            <a:ext cx="12191695" cy="1097280"/>
+            <a:off x="731520" y="1645920"/>
+            <a:ext cx="5120640" cy="4572000"/>
           </a:xfrm>
           <a:prstGeom prst="rect">
             <a:avLst/>
           </a:prstGeom>
           <a:solidFill>
-            <a:srgbClr val="0F172A"/>
+            <a:srgbClr val="FFFFFF"/>
           </a:solidFill>
           <a:ln>
-            <a:noFill/>
+            <a:solidFill>
+              <a:srgbClr val="E2E8F0"/>
+            </a:solidFill>
           </a:ln>
         </p:spPr>
         <p:style>
@@ -3266,14 +5177,14 @@
       </p:sp>
       <p:sp>
         <p:nvSpPr>
-          <p:cNvPr id="3" name="TextBox 2"/>
+          <p:cNvPr id="4" name="TextBox 3"/>
           <p:cNvSpPr txBox="1"/>
           <p:nvPr/>
         </p:nvSpPr>
         <p:spPr>
           <a:xfrm>
-            <a:off x="731520" y="137160"/>
-            <a:ext cx="10698480" cy="822960"/>
+            <a:off x="914400" y="1783080"/>
+            <a:ext cx="4754880" cy="4297680"/>
           </a:xfrm>
           <a:prstGeom prst="rect">
             <a:avLst/>
@@ -3287,40 +5198,133 @@
           <a:lstStyle/>
           <a:p>
             <a:pPr>
-              <a:defRPr sz="2400" b="1">
-                <a:solidFill>
-                  <a:srgbClr val="FFFFFF"/>
-                </a:solidFill>
-              </a:defRPr>
-            </a:pPr>
-            <a:r>
-              <a:t>1. Background &amp; Industrial Motivation</a:t>
-            </a:r>
-          </a:p>
-          <a:p>
-            <a:pPr>
-              <a:defRPr sz="1100">
-                <a:solidFill>
-                  <a:srgbClr val="94A3B8"/>
-                </a:solidFill>
-              </a:defRPr>
-            </a:pPr>
-            <a:r>
-              <a:t>Academic &amp; Industrial AI Project Series  |  Project 01 of 55</a:t>
-            </a:r>
-          </a:p>
-        </p:txBody>
-      </p:sp>
-      <p:sp>
-        <p:nvSpPr>
-          <p:cNvPr id="4" name="TextBox 3"/>
+              <a:defRPr sz="1300" b="1">
+                <a:solidFill>
+                  <a:srgbClr val="0284C7"/>
+                </a:solidFill>
+              </a:defRPr>
+            </a:pPr>
+            <a:r>
+              <a:t>Aviation Market Complexity</a:t>
+            </a:r>
+          </a:p>
+          <a:p>
+            <a:pPr>
+              <a:spcBef>
+                <a:spcPts val="400"/>
+              </a:spcBef>
+              <a:defRPr sz="1050">
+                <a:solidFill>
+                  <a:srgbClr val="0F172A"/>
+                </a:solidFill>
+              </a:defRPr>
+            </a:pPr>
+            <a:r>
+              <a:t>• Airline pricing policies fluctuate dynamically based on demand, seasonal trends, and route congestion.</a:t>
+            </a:r>
+          </a:p>
+          <a:p>
+            <a:pPr>
+              <a:spcBef>
+                <a:spcPts val="400"/>
+              </a:spcBef>
+              <a:defRPr sz="1050">
+                <a:solidFill>
+                  <a:srgbClr val="0F172A"/>
+                </a:solidFill>
+              </a:defRPr>
+            </a:pPr>
+            <a:r>
+              <a:t>• Traditional statistical methods fail to capture non-linear temporal sequence patterns across flight booking horizons.</a:t>
+            </a:r>
+          </a:p>
+          <a:p>
+            <a:pPr>
+              <a:spcBef>
+                <a:spcPts val="400"/>
+              </a:spcBef>
+              <a:defRPr sz="1050">
+                <a:solidFill>
+                  <a:srgbClr val="0F172A"/>
+                </a:solidFill>
+              </a:defRPr>
+            </a:pPr>
+            <a:r>
+              <a:t>• Consumers and corporate travel planners lack transparent price estimation benchmarks.</a:t>
+            </a:r>
+          </a:p>
+          <a:p>
+            <a:pPr>
+              <a:spcBef>
+                <a:spcPts val="400"/>
+              </a:spcBef>
+              <a:defRPr sz="1050">
+                <a:solidFill>
+                  <a:srgbClr val="0F172A"/>
+                </a:solidFill>
+              </a:defRPr>
+            </a:pPr>
+            <a:r>
+              <a:t>• Airlines require automated competitive intelligence models to monitor market fare adjustments.</a:t>
+            </a:r>
+          </a:p>
+        </p:txBody>
+      </p:sp>
+      <p:sp>
+        <p:nvSpPr>
+          <p:cNvPr id="5" name="Rectangle 4"/>
+          <p:cNvSpPr/>
+          <p:nvPr/>
+        </p:nvSpPr>
+        <p:spPr>
+          <a:xfrm>
+            <a:off x="6217920" y="1645920"/>
+            <a:ext cx="5212080" cy="4572000"/>
+          </a:xfrm>
+          <a:prstGeom prst="rect">
+            <a:avLst/>
+          </a:prstGeom>
+          <a:solidFill>
+            <a:srgbClr val="FFFFFF"/>
+          </a:solidFill>
+          <a:ln>
+            <a:solidFill>
+              <a:srgbClr val="E2E8F0"/>
+            </a:solidFill>
+          </a:ln>
+        </p:spPr>
+        <p:style>
+          <a:lnRef idx="1">
+            <a:schemeClr val="accent1"/>
+          </a:lnRef>
+          <a:fillRef idx="3">
+            <a:schemeClr val="accent1"/>
+          </a:fillRef>
+          <a:effectRef idx="2">
+            <a:schemeClr val="accent1"/>
+          </a:effectRef>
+          <a:fontRef idx="minor">
+            <a:schemeClr val="lt1"/>
+          </a:fontRef>
+        </p:style>
+        <p:txBody>
+          <a:bodyPr rtlCol="0" anchor="ctr"/>
+          <a:lstStyle/>
+          <a:p>
+            <a:pPr algn="ctr"/>
+          </a:p>
+        </p:txBody>
+      </p:sp>
+      <p:sp>
+        <p:nvSpPr>
+          <p:cNvPr id="6" name="TextBox 5"/>
           <p:cNvSpPr txBox="1"/>
           <p:nvPr/>
         </p:nvSpPr>
         <p:spPr>
           <a:xfrm>
-            <a:off x="731520" y="1371600"/>
-            <a:ext cx="10698480" cy="5029200"/>
+            <a:off x="6400800" y="1783080"/>
+            <a:ext cx="4846320" cy="4297680"/>
           </a:xfrm>
           <a:prstGeom prst="rect">
             <a:avLst/>
@@ -3334,85 +5338,74 @@
           <a:lstStyle/>
           <a:p>
             <a:pPr>
-              <a:defRPr sz="1800" b="1">
-                <a:solidFill>
-                  <a:srgbClr val="1E3A8A"/>
-                </a:solidFill>
-              </a:defRPr>
-            </a:pPr>
-            <a:r>
-              <a:t>Executive Problem Background:</a:t>
-            </a:r>
-          </a:p>
-          <a:p>
-            <a:pPr>
-              <a:spcBef>
-                <a:spcPts val="1000"/>
-              </a:spcBef>
-              <a:defRPr sz="1400">
-                <a:solidFill>
-                  <a:srgbClr val="334155"/>
-                </a:solidFill>
-              </a:defRPr>
-            </a:pPr>
-            <a:r>
-              <a:t>Globalization of markets involves new strategies and price policies from professionals that contribute to global competitiveness .The pricing of tickets is frequently changed by airline companies based on a range of criteria, including their own proprietary rules and algorithms that look for the best possible price policy. Artificial Intelligence (AI) models are being used more and more for the latter task because of its various potentials in data generalisation, compactness, and quick adaptabil...</a:t>
-            </a:r>
-          </a:p>
-          <a:p>
-            <a:pPr>
-              <a:spcBef>
-                <a:spcPts val="1400"/>
-              </a:spcBef>
-              <a:defRPr sz="1600" b="1"/>
-            </a:pPr>
-            <a:r>
-              <a:t>Core Industry Drivers:</a:t>
-            </a:r>
-          </a:p>
-          <a:p>
-            <a:pPr>
-              <a:spcBef>
-                <a:spcPts val="400"/>
-              </a:spcBef>
-              <a:defRPr sz="1300">
-                <a:solidFill>
-                  <a:srgbClr val="475569"/>
-                </a:solidFill>
-              </a:defRPr>
-            </a:pPr>
-            <a:r>
-              <a:t>• Manual legacy inspection/decision methods incur high operational costs, delay, and human error.</a:t>
-            </a:r>
-          </a:p>
-          <a:p>
-            <a:pPr>
-              <a:spcBef>
-                <a:spcPts val="400"/>
-              </a:spcBef>
-              <a:defRPr sz="1300">
-                <a:solidFill>
-                  <a:srgbClr val="475569"/>
-                </a:solidFill>
-              </a:defRPr>
-            </a:pPr>
-            <a:r>
-              <a:t>• Scalable automated solutions require low-latency edge and cloud neural network inference.</a:t>
-            </a:r>
-          </a:p>
-          <a:p>
-            <a:pPr>
-              <a:spcBef>
-                <a:spcPts val="400"/>
-              </a:spcBef>
-              <a:defRPr sz="1300">
-                <a:solidFill>
-                  <a:srgbClr val="475569"/>
-                </a:solidFill>
-              </a:defRPr>
-            </a:pPr>
-            <a:r>
-              <a:t>• Explainable prediction confidence metrics are essential for operational trust and regulatory compliance.</a:t>
+              <a:defRPr sz="1300" b="1">
+                <a:solidFill>
+                  <a:srgbClr val="0284C7"/>
+                </a:solidFill>
+              </a:defRPr>
+            </a:pPr>
+            <a:r>
+              <a:t>Research &amp; Practical Deficiencies</a:t>
+            </a:r>
+          </a:p>
+          <a:p>
+            <a:pPr>
+              <a:spcBef>
+                <a:spcPts val="400"/>
+              </a:spcBef>
+              <a:defRPr sz="1050">
+                <a:solidFill>
+                  <a:srgbClr val="0F172A"/>
+                </a:solidFill>
+              </a:defRPr>
+            </a:pPr>
+            <a:r>
+              <a:t>• Existing online booking portals provide real-time quotes but zero multi-horizon predictive forecasting.</a:t>
+            </a:r>
+          </a:p>
+          <a:p>
+            <a:pPr>
+              <a:spcBef>
+                <a:spcPts val="400"/>
+              </a:spcBef>
+              <a:defRPr sz="1050">
+                <a:solidFill>
+                  <a:srgbClr val="0F172A"/>
+                </a:solidFill>
+              </a:defRPr>
+            </a:pPr>
+            <a:r>
+              <a:t>• Static regression baselines suffer high error on multi-stop routes with variable layover times.</a:t>
+            </a:r>
+          </a:p>
+          <a:p>
+            <a:pPr>
+              <a:spcBef>
+                <a:spcPts val="400"/>
+              </a:spcBef>
+              <a:defRPr sz="1050">
+                <a:solidFill>
+                  <a:srgbClr val="0F172A"/>
+                </a:solidFill>
+              </a:defRPr>
+            </a:pPr>
+            <a:r>
+              <a:t>• Need for deep learning architectures (LSTMs) capable of capturing sequential feature interactions.</a:t>
+            </a:r>
+          </a:p>
+          <a:p>
+            <a:pPr>
+              <a:spcBef>
+                <a:spcPts val="400"/>
+              </a:spcBef>
+              <a:defRPr sz="1050">
+                <a:solidFill>
+                  <a:srgbClr val="0F172A"/>
+                </a:solidFill>
+              </a:defRPr>
+            </a:pPr>
+            <a:r>
+              <a:t>• Requirement for an accessible, interactive, and demonstrable engineering solution.</a:t>
             </a:r>
           </a:p>
         </p:txBody>
@@ -3437,23 +5430,72 @@
       <p:grpSpPr/>
       <p:sp>
         <p:nvSpPr>
-          <p:cNvPr id="2" name="Rectangle 1"/>
+          <p:cNvPr id="2" name="TextBox 1"/>
+          <p:cNvSpPr txBox="1"/>
+          <p:nvPr/>
+        </p:nvSpPr>
+        <p:spPr>
+          <a:xfrm>
+            <a:off x="731520" y="457200"/>
+            <a:ext cx="10728655" cy="1005840"/>
+          </a:xfrm>
+          <a:prstGeom prst="rect">
+            <a:avLst/>
+          </a:prstGeom>
+          <a:noFill/>
+        </p:spPr>
+        <p:txBody>
+          <a:bodyPr wrap="square">
+            <a:spAutoFit/>
+          </a:bodyPr>
+          <a:lstStyle/>
+          <a:p>
+            <a:pPr>
+              <a:defRPr sz="1000" b="1">
+                <a:solidFill>
+                  <a:srgbClr val="0284C7"/>
+                </a:solidFill>
+              </a:defRPr>
+            </a:pPr>
+            <a:r>
+              <a:t>PROJECT-001 • FINAL YEAR ENGINEERING PROJECT</a:t>
+            </a:r>
+          </a:p>
+          <a:p>
+            <a:pPr>
+              <a:defRPr sz="2200" b="1">
+                <a:solidFill>
+                  <a:srgbClr val="0F172A"/>
+                </a:solidFill>
+              </a:defRPr>
+            </a:pPr>
+            <a:r>
+              <a:t>2. Primary Project Objectives</a:t>
+            </a:r>
+          </a:p>
+        </p:txBody>
+      </p:sp>
+      <p:sp>
+        <p:nvSpPr>
+          <p:cNvPr id="3" name="Rectangle 2"/>
           <p:cNvSpPr/>
           <p:nvPr/>
         </p:nvSpPr>
         <p:spPr>
           <a:xfrm>
-            <a:off x="0" y="0"/>
-            <a:ext cx="12191695" cy="1097280"/>
+            <a:off x="731520" y="1645920"/>
+            <a:ext cx="3383280" cy="4572000"/>
           </a:xfrm>
           <a:prstGeom prst="rect">
             <a:avLst/>
           </a:prstGeom>
           <a:solidFill>
-            <a:srgbClr val="0F172A"/>
+            <a:srgbClr val="FFFFFF"/>
           </a:solidFill>
           <a:ln>
-            <a:noFill/>
+            <a:solidFill>
+              <a:srgbClr val="E2E8F0"/>
+            </a:solidFill>
           </a:ln>
         </p:spPr>
         <p:style>
@@ -3480,14 +5522,14 @@
       </p:sp>
       <p:sp>
         <p:nvSpPr>
-          <p:cNvPr id="3" name="TextBox 2"/>
+          <p:cNvPr id="4" name="TextBox 3"/>
           <p:cNvSpPr txBox="1"/>
           <p:nvPr/>
         </p:nvSpPr>
         <p:spPr>
           <a:xfrm>
-            <a:off x="731520" y="137160"/>
-            <a:ext cx="10698480" cy="822960"/>
+            <a:off x="914400" y="1783080"/>
+            <a:ext cx="3017520" cy="4297680"/>
           </a:xfrm>
           <a:prstGeom prst="rect">
             <a:avLst/>
@@ -3501,40 +5543,118 @@
           <a:lstStyle/>
           <a:p>
             <a:pPr>
-              <a:defRPr sz="2400" b="1">
-                <a:solidFill>
-                  <a:srgbClr val="FFFFFF"/>
-                </a:solidFill>
-              </a:defRPr>
-            </a:pPr>
-            <a:r>
-              <a:t>2. Problem Statement &amp; Key Objectives</a:t>
-            </a:r>
-          </a:p>
-          <a:p>
-            <a:pPr>
-              <a:defRPr sz="1100">
-                <a:solidFill>
-                  <a:srgbClr val="94A3B8"/>
-                </a:solidFill>
-              </a:defRPr>
-            </a:pPr>
-            <a:r>
-              <a:t>Academic &amp; Industrial AI Project Series  |  Project 01 of 55</a:t>
-            </a:r>
-          </a:p>
-        </p:txBody>
-      </p:sp>
-      <p:sp>
-        <p:nvSpPr>
-          <p:cNvPr id="4" name="TextBox 3"/>
+              <a:defRPr sz="1300" b="1">
+                <a:solidFill>
+                  <a:srgbClr val="0284C7"/>
+                </a:solidFill>
+              </a:defRPr>
+            </a:pPr>
+            <a:r>
+              <a:t>Empirical Machine Learning</a:t>
+            </a:r>
+          </a:p>
+          <a:p>
+            <a:pPr>
+              <a:spcBef>
+                <a:spcPts val="400"/>
+              </a:spcBef>
+              <a:defRPr sz="1050">
+                <a:solidFill>
+                  <a:srgbClr val="0F172A"/>
+                </a:solidFill>
+              </a:defRPr>
+            </a:pPr>
+            <a:r>
+              <a:t>• Train a Bidirectional LSTM neural network on real airline pricing data.</a:t>
+            </a:r>
+          </a:p>
+          <a:p>
+            <a:pPr>
+              <a:spcBef>
+                <a:spcPts val="400"/>
+              </a:spcBef>
+              <a:defRPr sz="1050">
+                <a:solidFill>
+                  <a:srgbClr val="0F172A"/>
+                </a:solidFill>
+              </a:defRPr>
+            </a:pPr>
+            <a:r>
+              <a:t>• Implement a Random Forest ensemble benchmark for comparative evaluation.</a:t>
+            </a:r>
+          </a:p>
+          <a:p>
+            <a:pPr>
+              <a:spcBef>
+                <a:spcPts val="400"/>
+              </a:spcBef>
+              <a:defRPr sz="1050">
+                <a:solidFill>
+                  <a:srgbClr val="0F172A"/>
+                </a:solidFill>
+              </a:defRPr>
+            </a:pPr>
+            <a:r>
+              <a:t>• Measure R² score, Mean Absolute Error (MAE), and Root Mean Squared Error (RMSE).</a:t>
+            </a:r>
+          </a:p>
+        </p:txBody>
+      </p:sp>
+      <p:sp>
+        <p:nvSpPr>
+          <p:cNvPr id="5" name="Rectangle 4"/>
+          <p:cNvSpPr/>
+          <p:nvPr/>
+        </p:nvSpPr>
+        <p:spPr>
+          <a:xfrm>
+            <a:off x="4389120" y="1645920"/>
+            <a:ext cx="3383280" cy="4572000"/>
+          </a:xfrm>
+          <a:prstGeom prst="rect">
+            <a:avLst/>
+          </a:prstGeom>
+          <a:solidFill>
+            <a:srgbClr val="FFFFFF"/>
+          </a:solidFill>
+          <a:ln>
+            <a:solidFill>
+              <a:srgbClr val="E2E8F0"/>
+            </a:solidFill>
+          </a:ln>
+        </p:spPr>
+        <p:style>
+          <a:lnRef idx="1">
+            <a:schemeClr val="accent1"/>
+          </a:lnRef>
+          <a:fillRef idx="3">
+            <a:schemeClr val="accent1"/>
+          </a:fillRef>
+          <a:effectRef idx="2">
+            <a:schemeClr val="accent1"/>
+          </a:effectRef>
+          <a:fontRef idx="minor">
+            <a:schemeClr val="lt1"/>
+          </a:fontRef>
+        </p:style>
+        <p:txBody>
+          <a:bodyPr rtlCol="0" anchor="ctr"/>
+          <a:lstStyle/>
+          <a:p>
+            <a:pPr algn="ctr"/>
+          </a:p>
+        </p:txBody>
+      </p:sp>
+      <p:sp>
+        <p:nvSpPr>
+          <p:cNvPr id="6" name="TextBox 5"/>
           <p:cNvSpPr txBox="1"/>
           <p:nvPr/>
         </p:nvSpPr>
         <p:spPr>
           <a:xfrm>
-            <a:off x="731520" y="1371600"/>
-            <a:ext cx="10698480" cy="5029200"/>
+            <a:off x="4572000" y="1783080"/>
+            <a:ext cx="3017520" cy="4297680"/>
           </a:xfrm>
           <a:prstGeom prst="rect">
             <a:avLst/>
@@ -3548,122 +5668,184 @@
           <a:lstStyle/>
           <a:p>
             <a:pPr>
-              <a:spcBef>
-                <a:spcPts val="800"/>
-              </a:spcBef>
-              <a:defRPr sz="1600" b="1">
-                <a:solidFill>
-                  <a:srgbClr val="10B981"/>
-                </a:solidFill>
-              </a:defRPr>
-            </a:pPr>
-            <a:r>
-              <a:t>✓ Predictive Accuracy &amp; Generalization</a:t>
-            </a:r>
-          </a:p>
-          <a:p>
-            <a:pPr>
-              <a:spcBef>
-                <a:spcPts val="200"/>
-              </a:spcBef>
-              <a:defRPr sz="1300">
-                <a:solidFill>
-                  <a:srgbClr val="475569"/>
-                </a:solidFill>
-              </a:defRPr>
-            </a:pPr>
-            <a:r>
-              <a:t>Achieve high validation precision across diverse real-world operating distributions.</a:t>
-            </a:r>
-          </a:p>
-          <a:p>
-            <a:pPr>
-              <a:spcBef>
-                <a:spcPts val="800"/>
-              </a:spcBef>
-              <a:defRPr sz="1600" b="1">
-                <a:solidFill>
-                  <a:srgbClr val="10B981"/>
-                </a:solidFill>
-              </a:defRPr>
-            </a:pPr>
-            <a:r>
-              <a:t>✓ Real-Time Low Latency Inference</a:t>
-            </a:r>
-          </a:p>
-          <a:p>
-            <a:pPr>
-              <a:spcBef>
-                <a:spcPts val="200"/>
-              </a:spcBef>
-              <a:defRPr sz="1300">
-                <a:solidFill>
-                  <a:srgbClr val="475569"/>
-                </a:solidFill>
-              </a:defRPr>
-            </a:pPr>
-            <a:r>
-              <a:t>Deliver end-to-end processing response times under 35 milliseconds per query.</a:t>
-            </a:r>
-          </a:p>
-          <a:p>
-            <a:pPr>
-              <a:spcBef>
-                <a:spcPts val="800"/>
-              </a:spcBef>
-              <a:defRPr sz="1600" b="1">
-                <a:solidFill>
-                  <a:srgbClr val="10B981"/>
-                </a:solidFill>
-              </a:defRPr>
-            </a:pPr>
-            <a:r>
-              <a:t>✓ Robust Anomaly &amp; Boundary Handling</a:t>
-            </a:r>
-          </a:p>
-          <a:p>
-            <a:pPr>
-              <a:spcBef>
-                <a:spcPts val="200"/>
-              </a:spcBef>
-              <a:defRPr sz="1300">
-                <a:solidFill>
-                  <a:srgbClr val="475569"/>
-                </a:solidFill>
-              </a:defRPr>
-            </a:pPr>
-            <a:r>
-              <a:t>Detect out-of-distribution instances and reject anomalous inputs with deterministic alerts.</a:t>
-            </a:r>
-          </a:p>
-          <a:p>
-            <a:pPr>
-              <a:spcBef>
-                <a:spcPts val="800"/>
-              </a:spcBef>
-              <a:defRPr sz="1600" b="1">
-                <a:solidFill>
-                  <a:srgbClr val="10B981"/>
-                </a:solidFill>
-              </a:defRPr>
-            </a:pPr>
-            <a:r>
-              <a:t>✓ Production-Ready Full Stack</a:t>
-            </a:r>
-          </a:p>
-          <a:p>
-            <a:pPr>
-              <a:spcBef>
-                <a:spcPts val="200"/>
-              </a:spcBef>
-              <a:defRPr sz="1300">
-                <a:solidFill>
-                  <a:srgbClr val="475569"/>
-                </a:solidFill>
-              </a:defRPr>
-            </a:pPr>
-            <a:r>
-              <a:t>Provide modular REST APIs, audit logging, and responsive user interfaces.</a:t>
+              <a:defRPr sz="1300" b="1">
+                <a:solidFill>
+                  <a:srgbClr val="0284C7"/>
+                </a:solidFill>
+              </a:defRPr>
+            </a:pPr>
+            <a:r>
+              <a:t>Enterprise Software System</a:t>
+            </a:r>
+          </a:p>
+          <a:p>
+            <a:pPr>
+              <a:spcBef>
+                <a:spcPts val="400"/>
+              </a:spcBef>
+              <a:defRPr sz="1050">
+                <a:solidFill>
+                  <a:srgbClr val="0F172A"/>
+                </a:solidFill>
+              </a:defRPr>
+            </a:pPr>
+            <a:r>
+              <a:t>• Develop a high-performance REST API with FastAPI in Python.</a:t>
+            </a:r>
+          </a:p>
+          <a:p>
+            <a:pPr>
+              <a:spcBef>
+                <a:spcPts val="400"/>
+              </a:spcBef>
+              <a:defRPr sz="1050">
+                <a:solidFill>
+                  <a:srgbClr val="0F172A"/>
+                </a:solidFill>
+              </a:defRPr>
+            </a:pPr>
+            <a:r>
+              <a:t>• Integrate SQLite database persistence for audit logging of all valuation queries.</a:t>
+            </a:r>
+          </a:p>
+          <a:p>
+            <a:pPr>
+              <a:spcBef>
+                <a:spcPts val="400"/>
+              </a:spcBef>
+              <a:defRPr sz="1050">
+                <a:solidFill>
+                  <a:srgbClr val="0F172A"/>
+                </a:solidFill>
+              </a:defRPr>
+            </a:pPr>
+            <a:r>
+              <a:t>• Provide instant latency (&lt; 40ms) suitable for real-time customer workflows.</a:t>
+            </a:r>
+          </a:p>
+        </p:txBody>
+      </p:sp>
+      <p:sp>
+        <p:nvSpPr>
+          <p:cNvPr id="7" name="Rectangle 6"/>
+          <p:cNvSpPr/>
+          <p:nvPr/>
+        </p:nvSpPr>
+        <p:spPr>
+          <a:xfrm>
+            <a:off x="8046720" y="1645920"/>
+            <a:ext cx="3383280" cy="4572000"/>
+          </a:xfrm>
+          <a:prstGeom prst="rect">
+            <a:avLst/>
+          </a:prstGeom>
+          <a:solidFill>
+            <a:srgbClr val="FFFFFF"/>
+          </a:solidFill>
+          <a:ln>
+            <a:solidFill>
+              <a:srgbClr val="E2E8F0"/>
+            </a:solidFill>
+          </a:ln>
+        </p:spPr>
+        <p:style>
+          <a:lnRef idx="1">
+            <a:schemeClr val="accent1"/>
+          </a:lnRef>
+          <a:fillRef idx="3">
+            <a:schemeClr val="accent1"/>
+          </a:fillRef>
+          <a:effectRef idx="2">
+            <a:schemeClr val="accent1"/>
+          </a:effectRef>
+          <a:fontRef idx="minor">
+            <a:schemeClr val="lt1"/>
+          </a:fontRef>
+        </p:style>
+        <p:txBody>
+          <a:bodyPr rtlCol="0" anchor="ctr"/>
+          <a:lstStyle/>
+          <a:p>
+            <a:pPr algn="ctr"/>
+          </a:p>
+        </p:txBody>
+      </p:sp>
+      <p:sp>
+        <p:nvSpPr>
+          <p:cNvPr id="8" name="TextBox 7"/>
+          <p:cNvSpPr txBox="1"/>
+          <p:nvPr/>
+        </p:nvSpPr>
+        <p:spPr>
+          <a:xfrm>
+            <a:off x="8229600" y="1783080"/>
+            <a:ext cx="3017520" cy="4297680"/>
+          </a:xfrm>
+          <a:prstGeom prst="rect">
+            <a:avLst/>
+          </a:prstGeom>
+          <a:noFill/>
+        </p:spPr>
+        <p:txBody>
+          <a:bodyPr wrap="square">
+            <a:spAutoFit/>
+          </a:bodyPr>
+          <a:lstStyle/>
+          <a:p>
+            <a:pPr>
+              <a:defRPr sz="1300" b="1">
+                <a:solidFill>
+                  <a:srgbClr val="0284C7"/>
+                </a:solidFill>
+              </a:defRPr>
+            </a:pPr>
+            <a:r>
+              <a:t>Demonstrable User Interface</a:t>
+            </a:r>
+          </a:p>
+          <a:p>
+            <a:pPr>
+              <a:spcBef>
+                <a:spcPts val="400"/>
+              </a:spcBef>
+              <a:defRPr sz="1050">
+                <a:solidFill>
+                  <a:srgbClr val="0F172A"/>
+                </a:solidFill>
+              </a:defRPr>
+            </a:pPr>
+            <a:r>
+              <a:t>• Deliver an intuitive, responsive web portal for flight price valuations.</a:t>
+            </a:r>
+          </a:p>
+          <a:p>
+            <a:pPr>
+              <a:spcBef>
+                <a:spcPts val="400"/>
+              </a:spcBef>
+              <a:defRPr sz="1050">
+                <a:solidFill>
+                  <a:srgbClr val="0F172A"/>
+                </a:solidFill>
+              </a:defRPr>
+            </a:pPr>
+            <a:r>
+              <a:t>• Display dynamic price breakdowns, route duration, and carrier insights.</a:t>
+            </a:r>
+          </a:p>
+          <a:p>
+            <a:pPr>
+              <a:spcBef>
+                <a:spcPts val="400"/>
+              </a:spcBef>
+              <a:defRPr sz="1050">
+                <a:solidFill>
+                  <a:srgbClr val="0F172A"/>
+                </a:solidFill>
+              </a:defRPr>
+            </a:pPr>
+            <a:r>
+              <a:t>• Present interactive analytics charts and historical query logs.</a:t>
             </a:r>
           </a:p>
         </p:txBody>
@@ -3688,23 +5870,72 @@
       <p:grpSpPr/>
       <p:sp>
         <p:nvSpPr>
-          <p:cNvPr id="2" name="Rectangle 1"/>
+          <p:cNvPr id="2" name="TextBox 1"/>
+          <p:cNvSpPr txBox="1"/>
+          <p:nvPr/>
+        </p:nvSpPr>
+        <p:spPr>
+          <a:xfrm>
+            <a:off x="731520" y="457200"/>
+            <a:ext cx="10728655" cy="1005840"/>
+          </a:xfrm>
+          <a:prstGeom prst="rect">
+            <a:avLst/>
+          </a:prstGeom>
+          <a:noFill/>
+        </p:spPr>
+        <p:txBody>
+          <a:bodyPr wrap="square">
+            <a:spAutoFit/>
+          </a:bodyPr>
+          <a:lstStyle/>
+          <a:p>
+            <a:pPr>
+              <a:defRPr sz="1000" b="1">
+                <a:solidFill>
+                  <a:srgbClr val="0284C7"/>
+                </a:solidFill>
+              </a:defRPr>
+            </a:pPr>
+            <a:r>
+              <a:t>PROJECT-001 • FINAL YEAR ENGINEERING PROJECT</a:t>
+            </a:r>
+          </a:p>
+          <a:p>
+            <a:pPr>
+              <a:defRPr sz="2200" b="1">
+                <a:solidFill>
+                  <a:srgbClr val="0F172A"/>
+                </a:solidFill>
+              </a:defRPr>
+            </a:pPr>
+            <a:r>
+              <a:t>3. End-to-End System Architecture</a:t>
+            </a:r>
+          </a:p>
+        </p:txBody>
+      </p:sp>
+      <p:sp>
+        <p:nvSpPr>
+          <p:cNvPr id="3" name="Rectangle 2"/>
           <p:cNvSpPr/>
           <p:nvPr/>
         </p:nvSpPr>
         <p:spPr>
           <a:xfrm>
-            <a:off x="0" y="0"/>
-            <a:ext cx="12191695" cy="1097280"/>
+            <a:off x="731520" y="1645920"/>
+            <a:ext cx="2468880" cy="4572000"/>
           </a:xfrm>
           <a:prstGeom prst="rect">
             <a:avLst/>
           </a:prstGeom>
           <a:solidFill>
-            <a:srgbClr val="0F172A"/>
+            <a:srgbClr val="FFFFFF"/>
           </a:solidFill>
           <a:ln>
-            <a:noFill/>
+            <a:solidFill>
+              <a:srgbClr val="E2E8F0"/>
+            </a:solidFill>
           </a:ln>
         </p:spPr>
         <p:style>
@@ -3731,14 +5962,14 @@
       </p:sp>
       <p:sp>
         <p:nvSpPr>
-          <p:cNvPr id="3" name="TextBox 2"/>
+          <p:cNvPr id="4" name="TextBox 3"/>
           <p:cNvSpPr txBox="1"/>
           <p:nvPr/>
         </p:nvSpPr>
         <p:spPr>
           <a:xfrm>
-            <a:off x="731520" y="137160"/>
-            <a:ext cx="10698480" cy="822960"/>
+            <a:off x="914400" y="1783080"/>
+            <a:ext cx="2103120" cy="4297680"/>
           </a:xfrm>
           <a:prstGeom prst="rect">
             <a:avLst/>
@@ -3752,40 +5983,148 @@
           <a:lstStyle/>
           <a:p>
             <a:pPr>
-              <a:defRPr sz="2400" b="1">
-                <a:solidFill>
-                  <a:srgbClr val="FFFFFF"/>
-                </a:solidFill>
-              </a:defRPr>
-            </a:pPr>
-            <a:r>
-              <a:t>3. System Architecture &amp; Workflow Pipeline</a:t>
-            </a:r>
-          </a:p>
-          <a:p>
-            <a:pPr>
-              <a:defRPr sz="1100">
-                <a:solidFill>
-                  <a:srgbClr val="94A3B8"/>
-                </a:solidFill>
-              </a:defRPr>
-            </a:pPr>
-            <a:r>
-              <a:t>Academic &amp; Industrial AI Project Series  |  Project 01 of 55</a:t>
-            </a:r>
-          </a:p>
-        </p:txBody>
-      </p:sp>
-      <p:sp>
-        <p:nvSpPr>
-          <p:cNvPr id="4" name="TextBox 3"/>
+              <a:defRPr sz="1300" b="1">
+                <a:solidFill>
+                  <a:srgbClr val="0284C7"/>
+                </a:solidFill>
+              </a:defRPr>
+            </a:pPr>
+            <a:r>
+              <a:t>1. Client Presentation</a:t>
+            </a:r>
+          </a:p>
+          <a:p>
+            <a:pPr>
+              <a:spcBef>
+                <a:spcPts val="400"/>
+              </a:spcBef>
+              <a:defRPr sz="1050">
+                <a:solidFill>
+                  <a:srgbClr val="0F172A"/>
+                </a:solidFill>
+              </a:defRPr>
+            </a:pPr>
+            <a:r>
+              <a:t>• HTML5 &amp; Modern CSS3</a:t>
+            </a:r>
+          </a:p>
+          <a:p>
+            <a:pPr>
+              <a:spcBef>
+                <a:spcPts val="400"/>
+              </a:spcBef>
+              <a:defRPr sz="1050">
+                <a:solidFill>
+                  <a:srgbClr val="0F172A"/>
+                </a:solidFill>
+              </a:defRPr>
+            </a:pPr>
+            <a:r>
+              <a:t>• Responsive Flexbox / Grid</a:t>
+            </a:r>
+          </a:p>
+          <a:p>
+            <a:pPr>
+              <a:spcBef>
+                <a:spcPts val="400"/>
+              </a:spcBef>
+              <a:defRPr sz="1050">
+                <a:solidFill>
+                  <a:srgbClr val="0F172A"/>
+                </a:solidFill>
+              </a:defRPr>
+            </a:pPr>
+            <a:r>
+              <a:t>• Asynchronous Fetch API</a:t>
+            </a:r>
+          </a:p>
+          <a:p>
+            <a:pPr>
+              <a:spcBef>
+                <a:spcPts val="400"/>
+              </a:spcBef>
+              <a:defRPr sz="1050">
+                <a:solidFill>
+                  <a:srgbClr val="0F172A"/>
+                </a:solidFill>
+              </a:defRPr>
+            </a:pPr>
+            <a:r>
+              <a:t>• Valuation Form &amp; Badges</a:t>
+            </a:r>
+          </a:p>
+          <a:p>
+            <a:pPr>
+              <a:spcBef>
+                <a:spcPts val="400"/>
+              </a:spcBef>
+              <a:defRPr sz="1050">
+                <a:solidFill>
+                  <a:srgbClr val="0F172A"/>
+                </a:solidFill>
+              </a:defRPr>
+            </a:pPr>
+            <a:r>
+              <a:t>• Performance &amp; History Tabs</a:t>
+            </a:r>
+          </a:p>
+        </p:txBody>
+      </p:sp>
+      <p:sp>
+        <p:nvSpPr>
+          <p:cNvPr id="5" name="Rectangle 4"/>
+          <p:cNvSpPr/>
+          <p:nvPr/>
+        </p:nvSpPr>
+        <p:spPr>
+          <a:xfrm>
+            <a:off x="3474720" y="1645920"/>
+            <a:ext cx="2468880" cy="4572000"/>
+          </a:xfrm>
+          <a:prstGeom prst="rect">
+            <a:avLst/>
+          </a:prstGeom>
+          <a:solidFill>
+            <a:srgbClr val="FFFFFF"/>
+          </a:solidFill>
+          <a:ln>
+            <a:solidFill>
+              <a:srgbClr val="E2E8F0"/>
+            </a:solidFill>
+          </a:ln>
+        </p:spPr>
+        <p:style>
+          <a:lnRef idx="1">
+            <a:schemeClr val="accent1"/>
+          </a:lnRef>
+          <a:fillRef idx="3">
+            <a:schemeClr val="accent1"/>
+          </a:fillRef>
+          <a:effectRef idx="2">
+            <a:schemeClr val="accent1"/>
+          </a:effectRef>
+          <a:fontRef idx="minor">
+            <a:schemeClr val="lt1"/>
+          </a:fontRef>
+        </p:style>
+        <p:txBody>
+          <a:bodyPr rtlCol="0" anchor="ctr"/>
+          <a:lstStyle/>
+          <a:p>
+            <a:pPr algn="ctr"/>
+          </a:p>
+        </p:txBody>
+      </p:sp>
+      <p:sp>
+        <p:nvSpPr>
+          <p:cNvPr id="6" name="TextBox 5"/>
           <p:cNvSpPr txBox="1"/>
           <p:nvPr/>
         </p:nvSpPr>
         <p:spPr>
           <a:xfrm>
-            <a:off x="731520" y="1371600"/>
-            <a:ext cx="10698480" cy="5029200"/>
+            <a:off x="3657600" y="1783080"/>
+            <a:ext cx="2103120" cy="4297680"/>
           </a:xfrm>
           <a:prstGeom prst="rect">
             <a:avLst/>
@@ -3799,137 +6138,399 @@
           <a:lstStyle/>
           <a:p>
             <a:pPr>
-              <a:spcBef>
-                <a:spcPts val="800"/>
-              </a:spcBef>
-              <a:defRPr sz="1500" b="1">
-                <a:solidFill>
-                  <a:srgbClr val="2563EB"/>
-                </a:solidFill>
-              </a:defRPr>
-            </a:pPr>
-            <a:r>
-              <a:t>[1] Ingestion Layer</a:t>
-            </a:r>
-          </a:p>
-          <a:p>
-            <a:pPr>
-              <a:defRPr sz="1300">
-                <a:solidFill>
-                  <a:srgbClr val="475569"/>
-                </a:solidFill>
-              </a:defRPr>
-            </a:pPr>
-            <a:r>
-              <a:t>Raw telemetry, video feeds, or structured tabular features ingested via secure endpoints.</a:t>
-            </a:r>
-          </a:p>
-          <a:p>
-            <a:pPr>
-              <a:spcBef>
-                <a:spcPts val="800"/>
-              </a:spcBef>
-              <a:defRPr sz="1500" b="1">
-                <a:solidFill>
-                  <a:srgbClr val="2563EB"/>
-                </a:solidFill>
-              </a:defRPr>
-            </a:pPr>
-            <a:r>
-              <a:t>[2] Preprocessing &amp; Normalization</a:t>
-            </a:r>
-          </a:p>
-          <a:p>
-            <a:pPr>
-              <a:defRPr sz="1300">
-                <a:solidFill>
-                  <a:srgbClr val="475569"/>
-                </a:solidFill>
-              </a:defRPr>
-            </a:pPr>
-            <a:r>
-              <a:t>Feature scaling, missing value imputation, winsorization, and tensor reshaping.</a:t>
-            </a:r>
-          </a:p>
-          <a:p>
-            <a:pPr>
-              <a:spcBef>
-                <a:spcPts val="800"/>
-              </a:spcBef>
-              <a:defRPr sz="1500" b="1">
-                <a:solidFill>
-                  <a:srgbClr val="2563EB"/>
-                </a:solidFill>
-              </a:defRPr>
-            </a:pPr>
-            <a:r>
-              <a:t>[3] Deep Neural Inference Engine</a:t>
-            </a:r>
-          </a:p>
-          <a:p>
-            <a:pPr>
-              <a:defRPr sz="1300">
-                <a:solidFill>
-                  <a:srgbClr val="475569"/>
-                </a:solidFill>
-              </a:defRPr>
-            </a:pPr>
-            <a:r>
-              <a:t>Optimized model evaluating representations with GPU/MPS/CPU acceleration.</a:t>
-            </a:r>
-          </a:p>
-          <a:p>
-            <a:pPr>
-              <a:spcBef>
-                <a:spcPts val="800"/>
-              </a:spcBef>
-              <a:defRPr sz="1500" b="1">
-                <a:solidFill>
-                  <a:srgbClr val="2563EB"/>
-                </a:solidFill>
-              </a:defRPr>
-            </a:pPr>
-            <a:r>
-              <a:t>[4] Post-Processing &amp; Decision Support</a:t>
-            </a:r>
-          </a:p>
-          <a:p>
-            <a:pPr>
-              <a:defRPr sz="1300">
-                <a:solidFill>
-                  <a:srgbClr val="475569"/>
-                </a:solidFill>
-              </a:defRPr>
-            </a:pPr>
-            <a:r>
-              <a:t>Threshold calibration, confidence scoring, classification/regression output formatting.</a:t>
-            </a:r>
-          </a:p>
-          <a:p>
-            <a:pPr>
-              <a:spcBef>
-                <a:spcPts val="800"/>
-              </a:spcBef>
-              <a:defRPr sz="1500" b="1">
-                <a:solidFill>
-                  <a:srgbClr val="2563EB"/>
-                </a:solidFill>
-              </a:defRPr>
-            </a:pPr>
-            <a:r>
-              <a:t>[5] Visualization &amp; Persistence</a:t>
-            </a:r>
-          </a:p>
-          <a:p>
-            <a:pPr>
-              <a:defRPr sz="1300">
-                <a:solidFill>
-                  <a:srgbClr val="475569"/>
-                </a:solidFill>
-              </a:defRPr>
-            </a:pPr>
-            <a:r>
-              <a:t>Interactive UI dashboard rendering metrics and SQLite/PostgreSQL audit logging.</a:t>
+              <a:defRPr sz="1300" b="1">
+                <a:solidFill>
+                  <a:srgbClr val="0284C7"/>
+                </a:solidFill>
+              </a:defRPr>
+            </a:pPr>
+            <a:r>
+              <a:t>2. FastAPI Backend</a:t>
+            </a:r>
+          </a:p>
+          <a:p>
+            <a:pPr>
+              <a:spcBef>
+                <a:spcPts val="400"/>
+              </a:spcBef>
+              <a:defRPr sz="1050">
+                <a:solidFill>
+                  <a:srgbClr val="0F172A"/>
+                </a:solidFill>
+              </a:defRPr>
+            </a:pPr>
+            <a:r>
+              <a:t>• Uvicorn ASGI Server</a:t>
+            </a:r>
+          </a:p>
+          <a:p>
+            <a:pPr>
+              <a:spcBef>
+                <a:spcPts val="400"/>
+              </a:spcBef>
+              <a:defRPr sz="1050">
+                <a:solidFill>
+                  <a:srgbClr val="0F172A"/>
+                </a:solidFill>
+              </a:defRPr>
+            </a:pPr>
+            <a:r>
+              <a:t>• REST Endpoints (/predict, /history)</a:t>
+            </a:r>
+          </a:p>
+          <a:p>
+            <a:pPr>
+              <a:spcBef>
+                <a:spcPts val="400"/>
+              </a:spcBef>
+              <a:defRPr sz="1050">
+                <a:solidFill>
+                  <a:srgbClr val="0F172A"/>
+                </a:solidFill>
+              </a:defRPr>
+            </a:pPr>
+            <a:r>
+              <a:t>• Pydantic Request Validation</a:t>
+            </a:r>
+          </a:p>
+          <a:p>
+            <a:pPr>
+              <a:spcBef>
+                <a:spcPts val="400"/>
+              </a:spcBef>
+              <a:defRPr sz="1050">
+                <a:solidFill>
+                  <a:srgbClr val="0F172A"/>
+                </a:solidFill>
+              </a:defRPr>
+            </a:pPr>
+            <a:r>
+              <a:t>• CORS Middleware</a:t>
+            </a:r>
+          </a:p>
+          <a:p>
+            <a:pPr>
+              <a:spcBef>
+                <a:spcPts val="400"/>
+              </a:spcBef>
+              <a:defRPr sz="1050">
+                <a:solidFill>
+                  <a:srgbClr val="0F172A"/>
+                </a:solidFill>
+              </a:defRPr>
+            </a:pPr>
+            <a:r>
+              <a:t>• Static Asset Routing</a:t>
+            </a:r>
+          </a:p>
+        </p:txBody>
+      </p:sp>
+      <p:sp>
+        <p:nvSpPr>
+          <p:cNvPr id="7" name="Rectangle 6"/>
+          <p:cNvSpPr/>
+          <p:nvPr/>
+        </p:nvSpPr>
+        <p:spPr>
+          <a:xfrm>
+            <a:off x="6217920" y="1645920"/>
+            <a:ext cx="2468880" cy="4572000"/>
+          </a:xfrm>
+          <a:prstGeom prst="rect">
+            <a:avLst/>
+          </a:prstGeom>
+          <a:solidFill>
+            <a:srgbClr val="FFFFFF"/>
+          </a:solidFill>
+          <a:ln>
+            <a:solidFill>
+              <a:srgbClr val="E2E8F0"/>
+            </a:solidFill>
+          </a:ln>
+        </p:spPr>
+        <p:style>
+          <a:lnRef idx="1">
+            <a:schemeClr val="accent1"/>
+          </a:lnRef>
+          <a:fillRef idx="3">
+            <a:schemeClr val="accent1"/>
+          </a:fillRef>
+          <a:effectRef idx="2">
+            <a:schemeClr val="accent1"/>
+          </a:effectRef>
+          <a:fontRef idx="minor">
+            <a:schemeClr val="lt1"/>
+          </a:fontRef>
+        </p:style>
+        <p:txBody>
+          <a:bodyPr rtlCol="0" anchor="ctr"/>
+          <a:lstStyle/>
+          <a:p>
+            <a:pPr algn="ctr"/>
+          </a:p>
+        </p:txBody>
+      </p:sp>
+      <p:sp>
+        <p:nvSpPr>
+          <p:cNvPr id="8" name="TextBox 7"/>
+          <p:cNvSpPr txBox="1"/>
+          <p:nvPr/>
+        </p:nvSpPr>
+        <p:spPr>
+          <a:xfrm>
+            <a:off x="6400800" y="1783080"/>
+            <a:ext cx="2103120" cy="4297680"/>
+          </a:xfrm>
+          <a:prstGeom prst="rect">
+            <a:avLst/>
+          </a:prstGeom>
+          <a:noFill/>
+        </p:spPr>
+        <p:txBody>
+          <a:bodyPr wrap="square">
+            <a:spAutoFit/>
+          </a:bodyPr>
+          <a:lstStyle/>
+          <a:p>
+            <a:pPr>
+              <a:defRPr sz="1300" b="1">
+                <a:solidFill>
+                  <a:srgbClr val="0284C7"/>
+                </a:solidFill>
+              </a:defRPr>
+            </a:pPr>
+            <a:r>
+              <a:t>3. Deep Learning Engine</a:t>
+            </a:r>
+          </a:p>
+          <a:p>
+            <a:pPr>
+              <a:spcBef>
+                <a:spcPts val="400"/>
+              </a:spcBef>
+              <a:defRPr sz="1050">
+                <a:solidFill>
+                  <a:srgbClr val="0F172A"/>
+                </a:solidFill>
+              </a:defRPr>
+            </a:pPr>
+            <a:r>
+              <a:t>• PyTorch 2.0 Bidirectional LSTM</a:t>
+            </a:r>
+          </a:p>
+          <a:p>
+            <a:pPr>
+              <a:spcBef>
+                <a:spcPts val="400"/>
+              </a:spcBef>
+              <a:defRPr sz="1050">
+                <a:solidFill>
+                  <a:srgbClr val="0F172A"/>
+                </a:solidFill>
+              </a:defRPr>
+            </a:pPr>
+            <a:r>
+              <a:t>• 2 Recurrent Layers (Hidden=64)</a:t>
+            </a:r>
+          </a:p>
+          <a:p>
+            <a:pPr>
+              <a:spcBef>
+                <a:spcPts val="400"/>
+              </a:spcBef>
+              <a:defRPr sz="1050">
+                <a:solidFill>
+                  <a:srgbClr val="0F172A"/>
+                </a:solidFill>
+              </a:defRPr>
+            </a:pPr>
+            <a:r>
+              <a:t>• Linear Projection Head</a:t>
+            </a:r>
+          </a:p>
+          <a:p>
+            <a:pPr>
+              <a:spcBef>
+                <a:spcPts val="400"/>
+              </a:spcBef>
+              <a:defRPr sz="1050">
+                <a:solidFill>
+                  <a:srgbClr val="0F172A"/>
+                </a:solidFill>
+              </a:defRPr>
+            </a:pPr>
+            <a:r>
+              <a:t>• Random Forest Benchmark</a:t>
+            </a:r>
+          </a:p>
+          <a:p>
+            <a:pPr>
+              <a:spcBef>
+                <a:spcPts val="400"/>
+              </a:spcBef>
+              <a:defRPr sz="1050">
+                <a:solidFill>
+                  <a:srgbClr val="0F172A"/>
+                </a:solidFill>
+              </a:defRPr>
+            </a:pPr>
+            <a:r>
+              <a:t>• StandardScaler &amp; OneHot</a:t>
+            </a:r>
+          </a:p>
+        </p:txBody>
+      </p:sp>
+      <p:sp>
+        <p:nvSpPr>
+          <p:cNvPr id="9" name="Rectangle 8"/>
+          <p:cNvSpPr/>
+          <p:nvPr/>
+        </p:nvSpPr>
+        <p:spPr>
+          <a:xfrm>
+            <a:off x="8961120" y="1645920"/>
+            <a:ext cx="2468880" cy="4572000"/>
+          </a:xfrm>
+          <a:prstGeom prst="rect">
+            <a:avLst/>
+          </a:prstGeom>
+          <a:solidFill>
+            <a:srgbClr val="FFFFFF"/>
+          </a:solidFill>
+          <a:ln>
+            <a:solidFill>
+              <a:srgbClr val="E2E8F0"/>
+            </a:solidFill>
+          </a:ln>
+        </p:spPr>
+        <p:style>
+          <a:lnRef idx="1">
+            <a:schemeClr val="accent1"/>
+          </a:lnRef>
+          <a:fillRef idx="3">
+            <a:schemeClr val="accent1"/>
+          </a:fillRef>
+          <a:effectRef idx="2">
+            <a:schemeClr val="accent1"/>
+          </a:effectRef>
+          <a:fontRef idx="minor">
+            <a:schemeClr val="lt1"/>
+          </a:fontRef>
+        </p:style>
+        <p:txBody>
+          <a:bodyPr rtlCol="0" anchor="ctr"/>
+          <a:lstStyle/>
+          <a:p>
+            <a:pPr algn="ctr"/>
+          </a:p>
+        </p:txBody>
+      </p:sp>
+      <p:sp>
+        <p:nvSpPr>
+          <p:cNvPr id="10" name="TextBox 9"/>
+          <p:cNvSpPr txBox="1"/>
+          <p:nvPr/>
+        </p:nvSpPr>
+        <p:spPr>
+          <a:xfrm>
+            <a:off x="9144000" y="1783080"/>
+            <a:ext cx="2103120" cy="4297680"/>
+          </a:xfrm>
+          <a:prstGeom prst="rect">
+            <a:avLst/>
+          </a:prstGeom>
+          <a:noFill/>
+        </p:spPr>
+        <p:txBody>
+          <a:bodyPr wrap="square">
+            <a:spAutoFit/>
+          </a:bodyPr>
+          <a:lstStyle/>
+          <a:p>
+            <a:pPr>
+              <a:defRPr sz="1300" b="1">
+                <a:solidFill>
+                  <a:srgbClr val="0284C7"/>
+                </a:solidFill>
+              </a:defRPr>
+            </a:pPr>
+            <a:r>
+              <a:t>4. Data Persistence</a:t>
+            </a:r>
+          </a:p>
+          <a:p>
+            <a:pPr>
+              <a:spcBef>
+                <a:spcPts val="400"/>
+              </a:spcBef>
+              <a:defRPr sz="1050">
+                <a:solidFill>
+                  <a:srgbClr val="0F172A"/>
+                </a:solidFill>
+              </a:defRPr>
+            </a:pPr>
+            <a:r>
+              <a:t>• Embedded SQLite (airfare.db)</a:t>
+            </a:r>
+          </a:p>
+          <a:p>
+            <a:pPr>
+              <a:spcBef>
+                <a:spcPts val="400"/>
+              </a:spcBef>
+              <a:defRPr sz="1050">
+                <a:solidFill>
+                  <a:srgbClr val="0F172A"/>
+                </a:solidFill>
+              </a:defRPr>
+            </a:pPr>
+            <a:r>
+              <a:t>• Auto-Increment Query IDs</a:t>
+            </a:r>
+          </a:p>
+          <a:p>
+            <a:pPr>
+              <a:spcBef>
+                <a:spcPts val="400"/>
+              </a:spcBef>
+              <a:defRPr sz="1050">
+                <a:solidFill>
+                  <a:srgbClr val="0F172A"/>
+                </a:solidFill>
+              </a:defRPr>
+            </a:pPr>
+            <a:r>
+              <a:t>• Timestamp Logging</a:t>
+            </a:r>
+          </a:p>
+          <a:p>
+            <a:pPr>
+              <a:spcBef>
+                <a:spcPts val="400"/>
+              </a:spcBef>
+              <a:defRPr sz="1050">
+                <a:solidFill>
+                  <a:srgbClr val="0F172A"/>
+                </a:solidFill>
+              </a:defRPr>
+            </a:pPr>
+            <a:r>
+              <a:t>• Aggregate Carrier Analytics</a:t>
+            </a:r>
+          </a:p>
+          <a:p>
+            <a:pPr>
+              <a:spcBef>
+                <a:spcPts val="400"/>
+              </a:spcBef>
+              <a:defRPr sz="1050">
+                <a:solidFill>
+                  <a:srgbClr val="0F172A"/>
+                </a:solidFill>
+              </a:defRPr>
+            </a:pPr>
+            <a:r>
+              <a:t>• Deterministic Reproducibility</a:t>
             </a:r>
           </a:p>
         </p:txBody>
@@ -3954,23 +6555,72 @@
       <p:grpSpPr/>
       <p:sp>
         <p:nvSpPr>
-          <p:cNvPr id="2" name="Rectangle 1"/>
+          <p:cNvPr id="2" name="TextBox 1"/>
+          <p:cNvSpPr txBox="1"/>
+          <p:nvPr/>
+        </p:nvSpPr>
+        <p:spPr>
+          <a:xfrm>
+            <a:off x="731520" y="457200"/>
+            <a:ext cx="10728655" cy="1005840"/>
+          </a:xfrm>
+          <a:prstGeom prst="rect">
+            <a:avLst/>
+          </a:prstGeom>
+          <a:noFill/>
+        </p:spPr>
+        <p:txBody>
+          <a:bodyPr wrap="square">
+            <a:spAutoFit/>
+          </a:bodyPr>
+          <a:lstStyle/>
+          <a:p>
+            <a:pPr>
+              <a:defRPr sz="1000" b="1">
+                <a:solidFill>
+                  <a:srgbClr val="0284C7"/>
+                </a:solidFill>
+              </a:defRPr>
+            </a:pPr>
+            <a:r>
+              <a:t>PROJECT-001 • FINAL YEAR ENGINEERING PROJECT</a:t>
+            </a:r>
+          </a:p>
+          <a:p>
+            <a:pPr>
+              <a:defRPr sz="2200" b="1">
+                <a:solidFill>
+                  <a:srgbClr val="0F172A"/>
+                </a:solidFill>
+              </a:defRPr>
+            </a:pPr>
+            <a:r>
+              <a:t>4. Dataset &amp; Preprocessing Pipeline</a:t>
+            </a:r>
+          </a:p>
+        </p:txBody>
+      </p:sp>
+      <p:sp>
+        <p:nvSpPr>
+          <p:cNvPr id="3" name="Rectangle 2"/>
           <p:cNvSpPr/>
           <p:nvPr/>
         </p:nvSpPr>
         <p:spPr>
           <a:xfrm>
-            <a:off x="0" y="0"/>
-            <a:ext cx="12191695" cy="1097280"/>
+            <a:off x="731520" y="1645920"/>
+            <a:ext cx="5120640" cy="4572000"/>
           </a:xfrm>
           <a:prstGeom prst="rect">
             <a:avLst/>
           </a:prstGeom>
           <a:solidFill>
-            <a:srgbClr val="0F172A"/>
+            <a:srgbClr val="FFFFFF"/>
           </a:solidFill>
           <a:ln>
-            <a:noFill/>
+            <a:solidFill>
+              <a:srgbClr val="E2E8F0"/>
+            </a:solidFill>
           </a:ln>
         </p:spPr>
         <p:style>
@@ -3997,14 +6647,14 @@
       </p:sp>
       <p:sp>
         <p:nvSpPr>
-          <p:cNvPr id="3" name="TextBox 2"/>
+          <p:cNvPr id="4" name="TextBox 3"/>
           <p:cNvSpPr txBox="1"/>
           <p:nvPr/>
         </p:nvSpPr>
         <p:spPr>
           <a:xfrm>
-            <a:off x="731520" y="137160"/>
-            <a:ext cx="10698480" cy="822960"/>
+            <a:off x="914400" y="1783080"/>
+            <a:ext cx="4754880" cy="4297680"/>
           </a:xfrm>
           <a:prstGeom prst="rect">
             <a:avLst/>
@@ -4018,40 +6668,133 @@
           <a:lstStyle/>
           <a:p>
             <a:pPr>
-              <a:defRPr sz="2400" b="1">
-                <a:solidFill>
-                  <a:srgbClr val="FFFFFF"/>
-                </a:solidFill>
-              </a:defRPr>
-            </a:pPr>
-            <a:r>
-              <a:t>4. Deep Learning &amp; ML Methodology</a:t>
-            </a:r>
-          </a:p>
-          <a:p>
-            <a:pPr>
-              <a:defRPr sz="1100">
-                <a:solidFill>
-                  <a:srgbClr val="94A3B8"/>
-                </a:solidFill>
-              </a:defRPr>
-            </a:pPr>
-            <a:r>
-              <a:t>Academic &amp; Industrial AI Project Series  |  Project 01 of 55</a:t>
-            </a:r>
-          </a:p>
-        </p:txBody>
-      </p:sp>
-      <p:sp>
-        <p:nvSpPr>
-          <p:cNvPr id="4" name="TextBox 3"/>
+              <a:defRPr sz="1300" b="1">
+                <a:solidFill>
+                  <a:srgbClr val="0284C7"/>
+                </a:solidFill>
+              </a:defRPr>
+            </a:pPr>
+            <a:r>
+              <a:t>Kaggle Flight Dataset Properties</a:t>
+            </a:r>
+          </a:p>
+          <a:p>
+            <a:pPr>
+              <a:spcBef>
+                <a:spcPts val="400"/>
+              </a:spcBef>
+              <a:defRPr sz="1050">
+                <a:solidFill>
+                  <a:srgbClr val="0F172A"/>
+                </a:solidFill>
+              </a:defRPr>
+            </a:pPr>
+            <a:r>
+              <a:t>• 10,683 verified domestic flight observations across India.</a:t>
+            </a:r>
+          </a:p>
+          <a:p>
+            <a:pPr>
+              <a:spcBef>
+                <a:spcPts val="400"/>
+              </a:spcBef>
+              <a:defRPr sz="1050">
+                <a:solidFill>
+                  <a:srgbClr val="0F172A"/>
+                </a:solidFill>
+              </a:defRPr>
+            </a:pPr>
+            <a:r>
+              <a:t>• Operating Carriers: IndiGo, Air India, Jet Airways, SpiceJet, Vistara, Air Asia, GoAir.</a:t>
+            </a:r>
+          </a:p>
+          <a:p>
+            <a:pPr>
+              <a:spcBef>
+                <a:spcPts val="400"/>
+              </a:spcBef>
+              <a:defRPr sz="1050">
+                <a:solidFill>
+                  <a:srgbClr val="0F172A"/>
+                </a:solidFill>
+              </a:defRPr>
+            </a:pPr>
+            <a:r>
+              <a:t>• Origins &amp; Destinations: Bangalore, Delhi, Mumbai, Kolkata, Chennai, Cochin, Hyderabad.</a:t>
+            </a:r>
+          </a:p>
+          <a:p>
+            <a:pPr>
+              <a:spcBef>
+                <a:spcPts val="400"/>
+              </a:spcBef>
+              <a:defRPr sz="1050">
+                <a:solidFill>
+                  <a:srgbClr val="0F172A"/>
+                </a:solidFill>
+              </a:defRPr>
+            </a:pPr>
+            <a:r>
+              <a:t>• Target Variable: Ticket Price in INR (Range: ₹1,759 to ₹79,512).</a:t>
+            </a:r>
+          </a:p>
+        </p:txBody>
+      </p:sp>
+      <p:sp>
+        <p:nvSpPr>
+          <p:cNvPr id="5" name="Rectangle 4"/>
+          <p:cNvSpPr/>
+          <p:nvPr/>
+        </p:nvSpPr>
+        <p:spPr>
+          <a:xfrm>
+            <a:off x="6217920" y="1645920"/>
+            <a:ext cx="5212080" cy="4572000"/>
+          </a:xfrm>
+          <a:prstGeom prst="rect">
+            <a:avLst/>
+          </a:prstGeom>
+          <a:solidFill>
+            <a:srgbClr val="FFFFFF"/>
+          </a:solidFill>
+          <a:ln>
+            <a:solidFill>
+              <a:srgbClr val="E2E8F0"/>
+            </a:solidFill>
+          </a:ln>
+        </p:spPr>
+        <p:style>
+          <a:lnRef idx="1">
+            <a:schemeClr val="accent1"/>
+          </a:lnRef>
+          <a:fillRef idx="3">
+            <a:schemeClr val="accent1"/>
+          </a:fillRef>
+          <a:effectRef idx="2">
+            <a:schemeClr val="accent1"/>
+          </a:effectRef>
+          <a:fontRef idx="minor">
+            <a:schemeClr val="lt1"/>
+          </a:fontRef>
+        </p:style>
+        <p:txBody>
+          <a:bodyPr rtlCol="0" anchor="ctr"/>
+          <a:lstStyle/>
+          <a:p>
+            <a:pPr algn="ctr"/>
+          </a:p>
+        </p:txBody>
+      </p:sp>
+      <p:sp>
+        <p:nvSpPr>
+          <p:cNvPr id="6" name="TextBox 5"/>
           <p:cNvSpPr txBox="1"/>
           <p:nvPr/>
         </p:nvSpPr>
         <p:spPr>
           <a:xfrm>
-            <a:off x="731520" y="1371600"/>
-            <a:ext cx="10698480" cy="5029200"/>
+            <a:off x="6400800" y="1783080"/>
+            <a:ext cx="4846320" cy="4297680"/>
           </a:xfrm>
           <a:prstGeom prst="rect">
             <a:avLst/>
@@ -4065,110 +6808,89 @@
           <a:lstStyle/>
           <a:p>
             <a:pPr>
-              <a:spcBef>
-                <a:spcPts val="800"/>
-              </a:spcBef>
-              <a:defRPr sz="1500" b="1">
-                <a:solidFill>
-                  <a:srgbClr val="0F172A"/>
-                </a:solidFill>
-              </a:defRPr>
-            </a:pPr>
-            <a:r>
-              <a:t>• Feature Engineering &amp; Dimensionality Alignment</a:t>
-            </a:r>
-          </a:p>
-          <a:p>
-            <a:pPr>
-              <a:defRPr sz="1300">
-                <a:solidFill>
-                  <a:srgbClr val="475569"/>
-                </a:solidFill>
-              </a:defRPr>
-            </a:pPr>
-            <a:r>
-              <a:t>Domain-specific feature extraction, temporal windowing, and embedding vectors.</a:t>
-            </a:r>
-          </a:p>
-          <a:p>
-            <a:pPr>
-              <a:spcBef>
-                <a:spcPts val="800"/>
-              </a:spcBef>
-              <a:defRPr sz="1500" b="1">
-                <a:solidFill>
-                  <a:srgbClr val="0F172A"/>
-                </a:solidFill>
-              </a:defRPr>
-            </a:pPr>
-            <a:r>
-              <a:t>• Model Family &amp; Optimization</a:t>
-            </a:r>
-          </a:p>
-          <a:p>
-            <a:pPr>
-              <a:defRPr sz="1300">
-                <a:solidFill>
-                  <a:srgbClr val="475569"/>
-                </a:solidFill>
-              </a:defRPr>
-            </a:pPr>
-            <a:r>
-              <a:t>Ensemble gradient boosting or deep neural networks trained with AdamW and adaptive LR scheduling.</a:t>
-            </a:r>
-          </a:p>
-          <a:p>
-            <a:pPr>
-              <a:spcBef>
-                <a:spcPts val="800"/>
-              </a:spcBef>
-              <a:defRPr sz="1500" b="1">
-                <a:solidFill>
-                  <a:srgbClr val="0F172A"/>
-                </a:solidFill>
-              </a:defRPr>
-            </a:pPr>
-            <a:r>
-              <a:t>• Overfitting Mitigation</a:t>
-            </a:r>
-          </a:p>
-          <a:p>
-            <a:pPr>
-              <a:defRPr sz="1300">
-                <a:solidFill>
-                  <a:srgbClr val="475569"/>
-                </a:solidFill>
-              </a:defRPr>
-            </a:pPr>
-            <a:r>
-              <a:t>Stratified k-fold cross-validation, dropout layers, early stopping, and data augmentation.</a:t>
-            </a:r>
-          </a:p>
-          <a:p>
-            <a:pPr>
-              <a:spcBef>
-                <a:spcPts val="800"/>
-              </a:spcBef>
-              <a:defRPr sz="1500" b="1">
-                <a:solidFill>
-                  <a:srgbClr val="0F172A"/>
-                </a:solidFill>
-              </a:defRPr>
-            </a:pPr>
-            <a:r>
-              <a:t>• Explainability &amp; Auditability</a:t>
-            </a:r>
-          </a:p>
-          <a:p>
-            <a:pPr>
-              <a:defRPr sz="1300">
-                <a:solidFill>
-                  <a:srgbClr val="475569"/>
-                </a:solidFill>
-              </a:defRPr>
-            </a:pPr>
-            <a:r>
-              <a:t>Confidence scores and feature importance attributions for high-stakes decisions.</a:t>
+              <a:defRPr sz="1300" b="1">
+                <a:solidFill>
+                  <a:srgbClr val="0284C7"/>
+                </a:solidFill>
+              </a:defRPr>
+            </a:pPr>
+            <a:r>
+              <a:t>Feature Engineering &amp; Transformation</a:t>
+            </a:r>
+          </a:p>
+          <a:p>
+            <a:pPr>
+              <a:spcBef>
+                <a:spcPts val="400"/>
+              </a:spcBef>
+              <a:defRPr sz="1050">
+                <a:solidFill>
+                  <a:srgbClr val="0F172A"/>
+                </a:solidFill>
+              </a:defRPr>
+            </a:pPr>
+            <a:r>
+              <a:t>• Date Parsing: Extracted Journey Day, Journey Month, and Day of Week.</a:t>
+            </a:r>
+          </a:p>
+          <a:p>
+            <a:pPr>
+              <a:spcBef>
+                <a:spcPts val="400"/>
+              </a:spcBef>
+              <a:defRPr sz="1050">
+                <a:solidFill>
+                  <a:srgbClr val="0F172A"/>
+                </a:solidFill>
+              </a:defRPr>
+            </a:pPr>
+            <a:r>
+              <a:t>• Temporal Encoding: Extracted Departure Hour/Min and Arrival Hour/Min.</a:t>
+            </a:r>
+          </a:p>
+          <a:p>
+            <a:pPr>
+              <a:spcBef>
+                <a:spcPts val="400"/>
+              </a:spcBef>
+              <a:defRPr sz="1050">
+                <a:solidFill>
+                  <a:srgbClr val="0F172A"/>
+                </a:solidFill>
+              </a:defRPr>
+            </a:pPr>
+            <a:r>
+              <a:t>• Duration Conversion: Transformed alphanumeric duration strings into total integer minutes.</a:t>
+            </a:r>
+          </a:p>
+          <a:p>
+            <a:pPr>
+              <a:spcBef>
+                <a:spcPts val="400"/>
+              </a:spcBef>
+              <a:defRPr sz="1050">
+                <a:solidFill>
+                  <a:srgbClr val="0F172A"/>
+                </a:solidFill>
+              </a:defRPr>
+            </a:pPr>
+            <a:r>
+              <a:t>• Stops Mapping: Converted routing stops into ordinal numeric codes (0 to 4 stops).</a:t>
+            </a:r>
+          </a:p>
+          <a:p>
+            <a:pPr>
+              <a:spcBef>
+                <a:spcPts val="400"/>
+              </a:spcBef>
+              <a:defRPr sz="1050">
+                <a:solidFill>
+                  <a:srgbClr val="0F172A"/>
+                </a:solidFill>
+              </a:defRPr>
+            </a:pPr>
+            <a:r>
+              <a:t>• ColumnTransformer: Scaled numeric features and one-hot encoded categorical variables into a 31-dim vector.</a:t>
             </a:r>
           </a:p>
         </p:txBody>
@@ -4193,23 +6915,96 @@
       <p:grpSpPr/>
       <p:sp>
         <p:nvSpPr>
-          <p:cNvPr id="2" name="Rectangle 1"/>
+          <p:cNvPr id="2" name="TextBox 1"/>
+          <p:cNvSpPr txBox="1"/>
+          <p:nvPr/>
+        </p:nvSpPr>
+        <p:spPr>
+          <a:xfrm>
+            <a:off x="731520" y="457200"/>
+            <a:ext cx="10728655" cy="1005840"/>
+          </a:xfrm>
+          <a:prstGeom prst="rect">
+            <a:avLst/>
+          </a:prstGeom>
+          <a:noFill/>
+        </p:spPr>
+        <p:txBody>
+          <a:bodyPr wrap="square">
+            <a:spAutoFit/>
+          </a:bodyPr>
+          <a:lstStyle/>
+          <a:p>
+            <a:pPr>
+              <a:defRPr sz="1000" b="1">
+                <a:solidFill>
+                  <a:srgbClr val="0284C7"/>
+                </a:solidFill>
+              </a:defRPr>
+            </a:pPr>
+            <a:r>
+              <a:t>PROJECT-001 • FINAL YEAR ENGINEERING PROJECT</a:t>
+            </a:r>
+          </a:p>
+          <a:p>
+            <a:pPr>
+              <a:defRPr sz="2200" b="1">
+                <a:solidFill>
+                  <a:srgbClr val="0F172A"/>
+                </a:solidFill>
+              </a:defRPr>
+            </a:pPr>
+            <a:r>
+              <a:t>5. System Implementation: Live Valuation Dashboard</a:t>
+            </a:r>
+          </a:p>
+        </p:txBody>
+      </p:sp>
+      <p:pic>
+        <p:nvPicPr>
+          <p:cNvPr id="3" name="Picture 2" descr="01_landing_dashboard.png"/>
+          <p:cNvPicPr>
+            <a:picLocks noChangeAspect="1"/>
+          </p:cNvPicPr>
+          <p:nvPr/>
+        </p:nvPicPr>
+        <p:blipFill>
+          <a:blip r:embed="rId2"/>
+          <a:stretch>
+            <a:fillRect/>
+          </a:stretch>
+        </p:blipFill>
+        <p:spPr>
+          <a:xfrm>
+            <a:off x="731520" y="1645920"/>
+            <a:ext cx="5486400" cy="3429000"/>
+          </a:xfrm>
+          <a:prstGeom prst="rect">
+            <a:avLst/>
+          </a:prstGeom>
+        </p:spPr>
+      </p:pic>
+      <p:sp>
+        <p:nvSpPr>
+          <p:cNvPr id="4" name="Rectangle 3"/>
           <p:cNvSpPr/>
           <p:nvPr/>
         </p:nvSpPr>
         <p:spPr>
           <a:xfrm>
-            <a:off x="0" y="0"/>
-            <a:ext cx="12191695" cy="1097280"/>
+            <a:off x="6492240" y="1645920"/>
+            <a:ext cx="4937760" cy="4572000"/>
           </a:xfrm>
           <a:prstGeom prst="rect">
             <a:avLst/>
           </a:prstGeom>
           <a:solidFill>
-            <a:srgbClr val="0F172A"/>
+            <a:srgbClr val="FFFFFF"/>
           </a:solidFill>
           <a:ln>
-            <a:noFill/>
+            <a:solidFill>
+              <a:srgbClr val="E2E8F0"/>
+            </a:solidFill>
           </a:ln>
         </p:spPr>
         <p:style>
@@ -4236,14 +7031,14 @@
       </p:sp>
       <p:sp>
         <p:nvSpPr>
-          <p:cNvPr id="3" name="TextBox 2"/>
+          <p:cNvPr id="5" name="TextBox 4"/>
           <p:cNvSpPr txBox="1"/>
           <p:nvPr/>
         </p:nvSpPr>
         <p:spPr>
           <a:xfrm>
-            <a:off x="731520" y="137160"/>
-            <a:ext cx="10698480" cy="822960"/>
+            <a:off x="6675120" y="1783080"/>
+            <a:ext cx="4572000" cy="4297680"/>
           </a:xfrm>
           <a:prstGeom prst="rect">
             <a:avLst/>
@@ -4257,109 +7052,89 @@
           <a:lstStyle/>
           <a:p>
             <a:pPr>
-              <a:defRPr sz="2400" b="1">
-                <a:solidFill>
-                  <a:srgbClr val="FFFFFF"/>
-                </a:solidFill>
-              </a:defRPr>
-            </a:pPr>
-            <a:r>
-              <a:t>5. Experimental Results &amp; Performance Benchmarks</a:t>
-            </a:r>
-          </a:p>
-          <a:p>
-            <a:pPr>
-              <a:defRPr sz="1100">
-                <a:solidFill>
-                  <a:srgbClr val="94A3B8"/>
-                </a:solidFill>
-              </a:defRPr>
-            </a:pPr>
-            <a:r>
-              <a:t>Academic &amp; Industrial AI Project Series  |  Project 01 of 55</a:t>
-            </a:r>
-          </a:p>
-        </p:txBody>
-      </p:sp>
-      <p:sp>
-        <p:nvSpPr>
-          <p:cNvPr id="4" name="TextBox 3"/>
-          <p:cNvSpPr txBox="1"/>
-          <p:nvPr/>
-        </p:nvSpPr>
-        <p:spPr>
-          <a:xfrm>
-            <a:off x="731520" y="1371600"/>
-            <a:ext cx="10698480" cy="5029200"/>
-          </a:xfrm>
-          <a:prstGeom prst="rect">
-            <a:avLst/>
-          </a:prstGeom>
-          <a:noFill/>
-        </p:spPr>
-        <p:txBody>
-          <a:bodyPr wrap="square">
-            <a:spAutoFit/>
-          </a:bodyPr>
-          <a:lstStyle/>
-          <a:p>
-            <a:pPr>
-              <a:spcBef>
-                <a:spcPts val="1200"/>
-              </a:spcBef>
-              <a:defRPr sz="1500" b="1">
-                <a:solidFill>
-                  <a:srgbClr val="10B981"/>
-                </a:solidFill>
-              </a:defRPr>
-            </a:pPr>
-            <a:r>
-              <a:t>★ Validation Accuracy / Score: Achieved 94.8% on independent validation test holdout partitions.</a:t>
-            </a:r>
-          </a:p>
-          <a:p>
-            <a:pPr>
-              <a:spcBef>
-                <a:spcPts val="1200"/>
-              </a:spcBef>
-              <a:defRPr sz="1500" b="1">
-                <a:solidFill>
-                  <a:srgbClr val="10B981"/>
-                </a:solidFill>
-              </a:defRPr>
-            </a:pPr>
-            <a:r>
-              <a:t>★ F1-Score / Macro Precision: Balanced metric of 0.932 across positive and negative classification targets.</a:t>
-            </a:r>
-          </a:p>
-          <a:p>
-            <a:pPr>
-              <a:spcBef>
-                <a:spcPts val="1200"/>
-              </a:spcBef>
-              <a:defRPr sz="1500" b="1">
-                <a:solidFill>
-                  <a:srgbClr val="10B981"/>
-                </a:solidFill>
-              </a:defRPr>
-            </a:pPr>
-            <a:r>
-              <a:t>★ Inference Latency Profile: Median latency of 18.4 ms per inference query on edge CPU hardware.</a:t>
-            </a:r>
-          </a:p>
-          <a:p>
-            <a:pPr>
-              <a:spcBef>
-                <a:spcPts val="1200"/>
-              </a:spcBef>
-              <a:defRPr sz="1500" b="1">
-                <a:solidFill>
-                  <a:srgbClr val="10B981"/>
-                </a:solidFill>
-              </a:defRPr>
-            </a:pPr>
-            <a:r>
-              <a:t>★ False Positive Rate (FPR): Maintained below 2.8%, satisfying stringent operational false alarm constraints.</a:t>
+              <a:defRPr sz="1300" b="1">
+                <a:solidFill>
+                  <a:srgbClr val="0284C7"/>
+                </a:solidFill>
+              </a:defRPr>
+            </a:pPr>
+            <a:r>
+              <a:t>Interface Design &amp; Input Workflow</a:t>
+            </a:r>
+          </a:p>
+          <a:p>
+            <a:pPr>
+              <a:spcBef>
+                <a:spcPts val="400"/>
+              </a:spcBef>
+              <a:defRPr sz="1050">
+                <a:solidFill>
+                  <a:srgbClr val="0F172A"/>
+                </a:solidFill>
+              </a:defRPr>
+            </a:pPr>
+            <a:r>
+              <a:t>• Aviation-themed modern responsive interface matching enterprise design standards.</a:t>
+            </a:r>
+          </a:p>
+          <a:p>
+            <a:pPr>
+              <a:spcBef>
+                <a:spcPts val="400"/>
+              </a:spcBef>
+              <a:defRPr sz="1050">
+                <a:solidFill>
+                  <a:srgbClr val="0F172A"/>
+                </a:solidFill>
+              </a:defRPr>
+            </a:pPr>
+            <a:r>
+              <a:t>• Carrier Selection: Dropdown supporting 8 major domestic and international carriers.</a:t>
+            </a:r>
+          </a:p>
+          <a:p>
+            <a:pPr>
+              <a:spcBef>
+                <a:spcPts val="400"/>
+              </a:spcBef>
+              <a:defRPr sz="1050">
+                <a:solidFill>
+                  <a:srgbClr val="0F172A"/>
+                </a:solidFill>
+              </a:defRPr>
+            </a:pPr>
+            <a:r>
+              <a:t>• Route Selection: Source and Destination airport selection with cross-city validation.</a:t>
+            </a:r>
+          </a:p>
+          <a:p>
+            <a:pPr>
+              <a:spcBef>
+                <a:spcPts val="400"/>
+              </a:spcBef>
+              <a:defRPr sz="1050">
+                <a:solidFill>
+                  <a:srgbClr val="0F172A"/>
+                </a:solidFill>
+              </a:defRPr>
+            </a:pPr>
+            <a:r>
+              <a:t>• Layover Selection: Configurable stops from Non-Stop direct flights up to 3 layovers.</a:t>
+            </a:r>
+          </a:p>
+          <a:p>
+            <a:pPr>
+              <a:spcBef>
+                <a:spcPts val="400"/>
+              </a:spcBef>
+              <a:defRPr sz="1050">
+                <a:solidFill>
+                  <a:srgbClr val="0F172A"/>
+                </a:solidFill>
+              </a:defRPr>
+            </a:pPr>
+            <a:r>
+              <a:t>• Departure and Arrival pickers calculating total flight duration dynamically.</a:t>
             </a:r>
           </a:p>
         </p:txBody>
@@ -4384,23 +7159,96 @@
       <p:grpSpPr/>
       <p:sp>
         <p:nvSpPr>
-          <p:cNvPr id="2" name="Rectangle 1"/>
+          <p:cNvPr id="2" name="TextBox 1"/>
+          <p:cNvSpPr txBox="1"/>
+          <p:nvPr/>
+        </p:nvSpPr>
+        <p:spPr>
+          <a:xfrm>
+            <a:off x="731520" y="457200"/>
+            <a:ext cx="10728655" cy="1005840"/>
+          </a:xfrm>
+          <a:prstGeom prst="rect">
+            <a:avLst/>
+          </a:prstGeom>
+          <a:noFill/>
+        </p:spPr>
+        <p:txBody>
+          <a:bodyPr wrap="square">
+            <a:spAutoFit/>
+          </a:bodyPr>
+          <a:lstStyle/>
+          <a:p>
+            <a:pPr>
+              <a:defRPr sz="1000" b="1">
+                <a:solidFill>
+                  <a:srgbClr val="0284C7"/>
+                </a:solidFill>
+              </a:defRPr>
+            </a:pPr>
+            <a:r>
+              <a:t>PROJECT-001 • FINAL YEAR ENGINEERING PROJECT</a:t>
+            </a:r>
+          </a:p>
+          <a:p>
+            <a:pPr>
+              <a:defRPr sz="2200" b="1">
+                <a:solidFill>
+                  <a:srgbClr val="0F172A"/>
+                </a:solidFill>
+              </a:defRPr>
+            </a:pPr>
+            <a:r>
+              <a:t>6. Real-Time Inference: Flight Valuation Results</a:t>
+            </a:r>
+          </a:p>
+        </p:txBody>
+      </p:sp>
+      <p:pic>
+        <p:nvPicPr>
+          <p:cNvPr id="3" name="Picture 2" descr="02_indigo_direct_prediction.png"/>
+          <p:cNvPicPr>
+            <a:picLocks noChangeAspect="1"/>
+          </p:cNvPicPr>
+          <p:nvPr/>
+        </p:nvPicPr>
+        <p:blipFill>
+          <a:blip r:embed="rId2"/>
+          <a:stretch>
+            <a:fillRect/>
+          </a:stretch>
+        </p:blipFill>
+        <p:spPr>
+          <a:xfrm>
+            <a:off x="731520" y="1645920"/>
+            <a:ext cx="5486400" cy="3429000"/>
+          </a:xfrm>
+          <a:prstGeom prst="rect">
+            <a:avLst/>
+          </a:prstGeom>
+        </p:spPr>
+      </p:pic>
+      <p:sp>
+        <p:nvSpPr>
+          <p:cNvPr id="4" name="Rectangle 3"/>
           <p:cNvSpPr/>
           <p:nvPr/>
         </p:nvSpPr>
         <p:spPr>
           <a:xfrm>
-            <a:off x="0" y="0"/>
-            <a:ext cx="12191695" cy="1097280"/>
+            <a:off x="6492240" y="1645920"/>
+            <a:ext cx="4937760" cy="4572000"/>
           </a:xfrm>
           <a:prstGeom prst="rect">
             <a:avLst/>
           </a:prstGeom>
           <a:solidFill>
-            <a:srgbClr val="0F172A"/>
+            <a:srgbClr val="FFFFFF"/>
           </a:solidFill>
           <a:ln>
-            <a:noFill/>
+            <a:solidFill>
+              <a:srgbClr val="E2E8F0"/>
+            </a:solidFill>
           </a:ln>
         </p:spPr>
         <p:style>
@@ -4427,14 +7275,14 @@
       </p:sp>
       <p:sp>
         <p:nvSpPr>
-          <p:cNvPr id="3" name="TextBox 2"/>
+          <p:cNvPr id="5" name="TextBox 4"/>
           <p:cNvSpPr txBox="1"/>
           <p:nvPr/>
         </p:nvSpPr>
         <p:spPr>
           <a:xfrm>
-            <a:off x="731520" y="137160"/>
-            <a:ext cx="10698480" cy="822960"/>
+            <a:off x="6675120" y="1783080"/>
+            <a:ext cx="4572000" cy="4297680"/>
           </a:xfrm>
           <a:prstGeom prst="rect">
             <a:avLst/>
@@ -4448,157 +7296,89 @@
           <a:lstStyle/>
           <a:p>
             <a:pPr>
-              <a:defRPr sz="2400" b="1">
-                <a:solidFill>
-                  <a:srgbClr val="FFFFFF"/>
-                </a:solidFill>
-              </a:defRPr>
-            </a:pPr>
-            <a:r>
-              <a:t>6. Technology Stack &amp; Production Deployment</a:t>
-            </a:r>
-          </a:p>
-          <a:p>
-            <a:pPr>
-              <a:defRPr sz="1100">
-                <a:solidFill>
-                  <a:srgbClr val="94A3B8"/>
-                </a:solidFill>
-              </a:defRPr>
-            </a:pPr>
-            <a:r>
-              <a:t>Academic &amp; Industrial AI Project Series  |  Project 01 of 55</a:t>
-            </a:r>
-          </a:p>
-        </p:txBody>
-      </p:sp>
-      <p:sp>
-        <p:nvSpPr>
-          <p:cNvPr id="4" name="TextBox 3"/>
-          <p:cNvSpPr txBox="1"/>
-          <p:nvPr/>
-        </p:nvSpPr>
-        <p:spPr>
-          <a:xfrm>
-            <a:off x="731520" y="1371600"/>
-            <a:ext cx="10698480" cy="5029200"/>
-          </a:xfrm>
-          <a:prstGeom prst="rect">
-            <a:avLst/>
-          </a:prstGeom>
-          <a:noFill/>
-        </p:spPr>
-        <p:txBody>
-          <a:bodyPr wrap="square">
-            <a:spAutoFit/>
-          </a:bodyPr>
-          <a:lstStyle/>
-          <a:p>
-            <a:pPr>
-              <a:spcBef>
-                <a:spcPts val="800"/>
-              </a:spcBef>
-              <a:defRPr sz="1500" b="1">
-                <a:solidFill>
-                  <a:srgbClr val="1E3A8A"/>
-                </a:solidFill>
-              </a:defRPr>
-            </a:pPr>
-            <a:r>
-              <a:t>⚙ Core Machine Learning Framework</a:t>
-            </a:r>
-          </a:p>
-          <a:p>
-            <a:pPr>
-              <a:defRPr sz="1300">
-                <a:solidFill>
-                  <a:srgbClr val="475569"/>
-                </a:solidFill>
-              </a:defRPr>
-            </a:pPr>
-            <a:r>
-              <a:t>PyTorch 2.0+ / Scikit-learn / HuggingFace Transformers / OpenCV</a:t>
-            </a:r>
-          </a:p>
-          <a:p>
-            <a:pPr>
-              <a:spcBef>
-                <a:spcPts val="800"/>
-              </a:spcBef>
-              <a:defRPr sz="1500" b="1">
-                <a:solidFill>
-                  <a:srgbClr val="1E3A8A"/>
-                </a:solidFill>
-              </a:defRPr>
-            </a:pPr>
-            <a:r>
-              <a:t>⚙ Asynchronous REST Backend</a:t>
-            </a:r>
-          </a:p>
-          <a:p>
-            <a:pPr>
-              <a:defRPr sz="1300">
-                <a:solidFill>
-                  <a:srgbClr val="475569"/>
-                </a:solidFill>
-              </a:defRPr>
-            </a:pPr>
-            <a:r>
-              <a:t>FastAPI / Uvicorn ASGI Server / Pydantic V2 Type Safety</a:t>
-            </a:r>
-          </a:p>
-          <a:p>
-            <a:pPr>
-              <a:spcBef>
-                <a:spcPts val="800"/>
-              </a:spcBef>
-              <a:defRPr sz="1500" b="1">
-                <a:solidFill>
-                  <a:srgbClr val="1E3A8A"/>
-                </a:solidFill>
-              </a:defRPr>
-            </a:pPr>
-            <a:r>
-              <a:t>⚙ Data Persistence &amp; Storage</a:t>
-            </a:r>
-          </a:p>
-          <a:p>
-            <a:pPr>
-              <a:defRPr sz="1300">
-                <a:solidFill>
-                  <a:srgbClr val="475569"/>
-                </a:solidFill>
-              </a:defRPr>
-            </a:pPr>
-            <a:r>
-              <a:t>SQLite / PostgreSQL with transactional integrity &amp; audit trail</a:t>
-            </a:r>
-          </a:p>
-          <a:p>
-            <a:pPr>
-              <a:spcBef>
-                <a:spcPts val="800"/>
-              </a:spcBef>
-              <a:defRPr sz="1500" b="1">
-                <a:solidFill>
-                  <a:srgbClr val="1E3A8A"/>
-                </a:solidFill>
-              </a:defRPr>
-            </a:pPr>
-            <a:r>
-              <a:t>⚙ Interactive Frontend Layer</a:t>
-            </a:r>
-          </a:p>
-          <a:p>
-            <a:pPr>
-              <a:defRPr sz="1300">
-                <a:solidFill>
-                  <a:srgbClr val="475569"/>
-                </a:solidFill>
-              </a:defRPr>
-            </a:pPr>
-            <a:r>
-              <a:t>Modern Responsive Web Portal (HTML5, Tailwind/CSS, JavaScript ES6+)</a:t>
+              <a:defRPr sz="1300" b="1">
+                <a:solidFill>
+                  <a:srgbClr val="0284C7"/>
+                </a:solidFill>
+              </a:defRPr>
+            </a:pPr>
+            <a:r>
+              <a:t>Model Prediction Breakdown</a:t>
+            </a:r>
+          </a:p>
+          <a:p>
+            <a:pPr>
+              <a:spcBef>
+                <a:spcPts val="400"/>
+              </a:spcBef>
+              <a:defRPr sz="1050">
+                <a:solidFill>
+                  <a:srgbClr val="0F172A"/>
+                </a:solidFill>
+              </a:defRPr>
+            </a:pPr>
+            <a:r>
+              <a:t>• Primary Fare Banner: Prominently renders predicted fare (₹4,108 / ~.20 USD).</a:t>
+            </a:r>
+          </a:p>
+          <a:p>
+            <a:pPr>
+              <a:spcBef>
+                <a:spcPts val="400"/>
+              </a:spcBef>
+              <a:defRPr sz="1050">
+                <a:solidFill>
+                  <a:srgbClr val="0F172A"/>
+                </a:solidFill>
+              </a:defRPr>
+            </a:pPr>
+            <a:r>
+              <a:t>• Comparative Decomposition: Displays individual predictions from both the LSTM Regressor (₹3,960) and Random Forest (₹4,330).</a:t>
+            </a:r>
+          </a:p>
+          <a:p>
+            <a:pPr>
+              <a:spcBef>
+                <a:spcPts val="400"/>
+              </a:spcBef>
+              <a:defRPr sz="1050">
+                <a:solidFill>
+                  <a:srgbClr val="0F172A"/>
+                </a:solidFill>
+              </a:defRPr>
+            </a:pPr>
+            <a:r>
+              <a:t>• Confidence Band: Dynamic prediction interval computed from test split MAE.</a:t>
+            </a:r>
+          </a:p>
+          <a:p>
+            <a:pPr>
+              <a:spcBef>
+                <a:spcPts val="400"/>
+              </a:spcBef>
+              <a:defRPr sz="1050">
+                <a:solidFill>
+                  <a:srgbClr val="0F172A"/>
+                </a:solidFill>
+              </a:defRPr>
+            </a:pPr>
+            <a:r>
+              <a:t>• Duration Badge: Accurately formats flight travel window (e.g. 2h 45m).</a:t>
+            </a:r>
+          </a:p>
+          <a:p>
+            <a:pPr>
+              <a:spcBef>
+                <a:spcPts val="400"/>
+              </a:spcBef>
+              <a:defRPr sz="1050">
+                <a:solidFill>
+                  <a:srgbClr val="0F172A"/>
+                </a:solidFill>
+              </a:defRPr>
+            </a:pPr>
+            <a:r>
+              <a:t>• Ultra-low inference latency (&lt; 40ms) verified during execution.</a:t>
             </a:r>
           </a:p>
         </p:txBody>
@@ -4623,23 +7403,96 @@
       <p:grpSpPr/>
       <p:sp>
         <p:nvSpPr>
-          <p:cNvPr id="2" name="Rectangle 1"/>
+          <p:cNvPr id="2" name="TextBox 1"/>
+          <p:cNvSpPr txBox="1"/>
+          <p:nvPr/>
+        </p:nvSpPr>
+        <p:spPr>
+          <a:xfrm>
+            <a:off x="731520" y="457200"/>
+            <a:ext cx="10728655" cy="1005840"/>
+          </a:xfrm>
+          <a:prstGeom prst="rect">
+            <a:avLst/>
+          </a:prstGeom>
+          <a:noFill/>
+        </p:spPr>
+        <p:txBody>
+          <a:bodyPr wrap="square">
+            <a:spAutoFit/>
+          </a:bodyPr>
+          <a:lstStyle/>
+          <a:p>
+            <a:pPr>
+              <a:defRPr sz="1000" b="1">
+                <a:solidFill>
+                  <a:srgbClr val="0284C7"/>
+                </a:solidFill>
+              </a:defRPr>
+            </a:pPr>
+            <a:r>
+              <a:t>PROJECT-001 • FINAL YEAR ENGINEERING PROJECT</a:t>
+            </a:r>
+          </a:p>
+          <a:p>
+            <a:pPr>
+              <a:defRPr sz="2200" b="1">
+                <a:solidFill>
+                  <a:srgbClr val="0F172A"/>
+                </a:solidFill>
+              </a:defRPr>
+            </a:pPr>
+            <a:r>
+              <a:t>7. Multi-Stop Route Analysis &amp; Stop Penalty</a:t>
+            </a:r>
+          </a:p>
+        </p:txBody>
+      </p:sp>
+      <p:pic>
+        <p:nvPicPr>
+          <p:cNvPr id="3" name="Picture 2" descr="03_airindia_stops_prediction.png"/>
+          <p:cNvPicPr>
+            <a:picLocks noChangeAspect="1"/>
+          </p:cNvPicPr>
+          <p:nvPr/>
+        </p:nvPicPr>
+        <p:blipFill>
+          <a:blip r:embed="rId2"/>
+          <a:stretch>
+            <a:fillRect/>
+          </a:stretch>
+        </p:blipFill>
+        <p:spPr>
+          <a:xfrm>
+            <a:off x="731520" y="1645920"/>
+            <a:ext cx="5486400" cy="3429000"/>
+          </a:xfrm>
+          <a:prstGeom prst="rect">
+            <a:avLst/>
+          </a:prstGeom>
+        </p:spPr>
+      </p:pic>
+      <p:sp>
+        <p:nvSpPr>
+          <p:cNvPr id="4" name="Rectangle 3"/>
           <p:cNvSpPr/>
           <p:nvPr/>
         </p:nvSpPr>
         <p:spPr>
           <a:xfrm>
-            <a:off x="0" y="0"/>
-            <a:ext cx="12191695" cy="1097280"/>
+            <a:off x="6492240" y="1645920"/>
+            <a:ext cx="4937760" cy="4572000"/>
           </a:xfrm>
           <a:prstGeom prst="rect">
             <a:avLst/>
           </a:prstGeom>
           <a:solidFill>
-            <a:srgbClr val="0F172A"/>
+            <a:srgbClr val="FFFFFF"/>
           </a:solidFill>
           <a:ln>
-            <a:noFill/>
+            <a:solidFill>
+              <a:srgbClr val="E2E8F0"/>
+            </a:solidFill>
           </a:ln>
         </p:spPr>
         <p:style>
@@ -4666,14 +7519,14 @@
       </p:sp>
       <p:sp>
         <p:nvSpPr>
-          <p:cNvPr id="3" name="TextBox 2"/>
+          <p:cNvPr id="5" name="TextBox 4"/>
           <p:cNvSpPr txBox="1"/>
           <p:nvPr/>
         </p:nvSpPr>
         <p:spPr>
           <a:xfrm>
-            <a:off x="731520" y="137160"/>
-            <a:ext cx="10698480" cy="822960"/>
+            <a:off x="6675120" y="1783080"/>
+            <a:ext cx="4572000" cy="4297680"/>
           </a:xfrm>
           <a:prstGeom prst="rect">
             <a:avLst/>
@@ -4687,40 +7540,106 @@
           <a:lstStyle/>
           <a:p>
             <a:pPr>
-              <a:defRPr sz="2400" b="1">
-                <a:solidFill>
-                  <a:srgbClr val="FFFFFF"/>
-                </a:solidFill>
-              </a:defRPr>
-            </a:pPr>
-            <a:r>
-              <a:t>7. Conclusion &amp; Future Roadmap</a:t>
-            </a:r>
-          </a:p>
-          <a:p>
-            <a:pPr>
-              <a:defRPr sz="1100">
-                <a:solidFill>
-                  <a:srgbClr val="94A3B8"/>
-                </a:solidFill>
-              </a:defRPr>
-            </a:pPr>
-            <a:r>
-              <a:t>Academic &amp; Industrial AI Project Series  |  Project 01 of 55</a:t>
-            </a:r>
-          </a:p>
-        </p:txBody>
-      </p:sp>
-      <p:sp>
-        <p:nvSpPr>
-          <p:cNvPr id="4" name="TextBox 3"/>
+              <a:defRPr sz="1300" b="1">
+                <a:solidFill>
+                  <a:srgbClr val="0284C7"/>
+                </a:solidFill>
+              </a:defRPr>
+            </a:pPr>
+            <a:r>
+              <a:t>Routing Complexity &amp; Layover Impact</a:t>
+            </a:r>
+          </a:p>
+          <a:p>
+            <a:pPr>
+              <a:spcBef>
+                <a:spcPts val="400"/>
+              </a:spcBef>
+              <a:defRPr sz="1050">
+                <a:solidFill>
+                  <a:srgbClr val="0F172A"/>
+                </a:solidFill>
+              </a:defRPr>
+            </a:pPr>
+            <a:r>
+              <a:t>• Evaluated Air India route from Mumbai to Cochin with 2 layover stops.</a:t>
+            </a:r>
+          </a:p>
+          <a:p>
+            <a:pPr>
+              <a:spcBef>
+                <a:spcPts val="400"/>
+              </a:spcBef>
+              <a:defRPr sz="1050">
+                <a:solidFill>
+                  <a:srgbClr val="0F172A"/>
+                </a:solidFill>
+              </a:defRPr>
+            </a:pPr>
+            <a:r>
+              <a:t>• Inference engine accurately applies layover time and multi-leg carrier costs.</a:t>
+            </a:r>
+          </a:p>
+          <a:p>
+            <a:pPr>
+              <a:spcBef>
+                <a:spcPts val="400"/>
+              </a:spcBef>
+              <a:defRPr sz="1050">
+                <a:solidFill>
+                  <a:srgbClr val="0F172A"/>
+                </a:solidFill>
+              </a:defRPr>
+            </a:pPr>
+            <a:r>
+              <a:t>• Dynamic pricing tier badges classify ticket into Budget, Standard, or Premium Fare.</a:t>
+            </a:r>
+          </a:p>
+          <a:p>
+            <a:pPr>
+              <a:spcBef>
+                <a:spcPts val="400"/>
+              </a:spcBef>
+              <a:defRPr sz="1050">
+                <a:solidFill>
+                  <a:srgbClr val="0F172A"/>
+                </a:solidFill>
+              </a:defRPr>
+            </a:pPr>
+            <a:r>
+              <a:t>• Persistent query logging automatically triggered upon prediction completion.</a:t>
+            </a:r>
+          </a:p>
+        </p:txBody>
+      </p:sp>
+    </p:spTree>
+  </p:cSld>
+  <p:clrMapOvr>
+    <a:masterClrMapping/>
+  </p:clrMapOvr>
+</p:sld>
+</file>
+
+<file path=ppt/slides/slide9.xml><?xml version="1.0" encoding="utf-8"?>
+<p:sld xmlns:a="http://schemas.openxmlformats.org/drawingml/2006/main" xmlns:p="http://schemas.openxmlformats.org/presentationml/2006/main" xmlns:r="http://schemas.openxmlformats.org/officeDocument/2006/relationships">
+  <p:cSld>
+    <p:spTree>
+      <p:nvGrpSpPr>
+        <p:cNvPr id="1" name=""/>
+        <p:cNvGrpSpPr/>
+        <p:nvPr/>
+      </p:nvGrpSpPr>
+      <p:grpSpPr/>
+      <p:sp>
+        <p:nvSpPr>
+          <p:cNvPr id="2" name="TextBox 1"/>
           <p:cNvSpPr txBox="1"/>
           <p:nvPr/>
         </p:nvSpPr>
         <p:spPr>
           <a:xfrm>
-            <a:off x="731520" y="1371600"/>
-            <a:ext cx="10698480" cy="5029200"/>
+            <a:off x="731520" y="457200"/>
+            <a:ext cx="10728655" cy="1005840"/>
           </a:xfrm>
           <a:prstGeom prst="rect">
             <a:avLst/>
@@ -4734,83 +7653,205 @@
           <a:lstStyle/>
           <a:p>
             <a:pPr>
-              <a:spcBef>
-                <a:spcPts val="1000"/>
-              </a:spcBef>
-              <a:defRPr sz="1500" b="1">
-                <a:solidFill>
-                  <a:srgbClr val="0F172A"/>
-                </a:solidFill>
-              </a:defRPr>
-            </a:pPr>
-            <a:r>
-              <a:t>■ Project Accomplishments</a:t>
-            </a:r>
-          </a:p>
-          <a:p>
-            <a:pPr>
-              <a:defRPr sz="1300">
-                <a:solidFill>
-                  <a:srgbClr val="475569"/>
-                </a:solidFill>
-              </a:defRPr>
-            </a:pPr>
-            <a:r>
-              <a:t>Engineered a robust, end-to-end prototype validating the initial abstract with reproducible experiments.</a:t>
-            </a:r>
-          </a:p>
-          <a:p>
-            <a:pPr>
-              <a:spcBef>
-                <a:spcPts val="1000"/>
-              </a:spcBef>
-              <a:defRPr sz="1500" b="1">
-                <a:solidFill>
-                  <a:srgbClr val="0F172A"/>
-                </a:solidFill>
-              </a:defRPr>
-            </a:pPr>
-            <a:r>
-              <a:t>■ Industrial Significance</a:t>
-            </a:r>
-          </a:p>
-          <a:p>
-            <a:pPr>
-              <a:defRPr sz="1300">
-                <a:solidFill>
-                  <a:srgbClr val="475569"/>
-                </a:solidFill>
-              </a:defRPr>
-            </a:pPr>
-            <a:r>
-              <a:t>Eliminates latency and manual friction while ensuring high confidence automated decision support.</a:t>
-            </a:r>
-          </a:p>
-          <a:p>
-            <a:pPr>
-              <a:spcBef>
-                <a:spcPts val="1000"/>
-              </a:spcBef>
-              <a:defRPr sz="1500" b="1">
-                <a:solidFill>
-                  <a:srgbClr val="0F172A"/>
-                </a:solidFill>
-              </a:defRPr>
-            </a:pPr>
-            <a:r>
-              <a:t>■ Future Scope &amp; Extensions</a:t>
-            </a:r>
-          </a:p>
-          <a:p>
-            <a:pPr>
-              <a:defRPr sz="1300">
-                <a:solidFill>
-                  <a:srgbClr val="475569"/>
-                </a:solidFill>
-              </a:defRPr>
-            </a:pPr>
-            <a:r>
-              <a:t>Integration with federated edge sensors, distributed multi-tenant cloud clustering, and automated active learning.</a:t>
+              <a:defRPr sz="1000" b="1">
+                <a:solidFill>
+                  <a:srgbClr val="0284C7"/>
+                </a:solidFill>
+              </a:defRPr>
+            </a:pPr>
+            <a:r>
+              <a:t>PROJECT-001 • FINAL YEAR ENGINEERING PROJECT</a:t>
+            </a:r>
+          </a:p>
+          <a:p>
+            <a:pPr>
+              <a:defRPr sz="2200" b="1">
+                <a:solidFill>
+                  <a:srgbClr val="0F172A"/>
+                </a:solidFill>
+              </a:defRPr>
+            </a:pPr>
+            <a:r>
+              <a:t>8. Model Performance &amp; Academic Benchmarks</a:t>
+            </a:r>
+          </a:p>
+        </p:txBody>
+      </p:sp>
+      <p:pic>
+        <p:nvPicPr>
+          <p:cNvPr id="3" name="Picture 2" descr="04_model_performance_tab.png"/>
+          <p:cNvPicPr>
+            <a:picLocks noChangeAspect="1"/>
+          </p:cNvPicPr>
+          <p:nvPr/>
+        </p:nvPicPr>
+        <p:blipFill>
+          <a:blip r:embed="rId2"/>
+          <a:stretch>
+            <a:fillRect/>
+          </a:stretch>
+        </p:blipFill>
+        <p:spPr>
+          <a:xfrm>
+            <a:off x="731520" y="1645920"/>
+            <a:ext cx="5486400" cy="3429000"/>
+          </a:xfrm>
+          <a:prstGeom prst="rect">
+            <a:avLst/>
+          </a:prstGeom>
+        </p:spPr>
+      </p:pic>
+      <p:sp>
+        <p:nvSpPr>
+          <p:cNvPr id="4" name="Rectangle 3"/>
+          <p:cNvSpPr/>
+          <p:nvPr/>
+        </p:nvSpPr>
+        <p:spPr>
+          <a:xfrm>
+            <a:off x="6492240" y="1645920"/>
+            <a:ext cx="4937760" cy="4572000"/>
+          </a:xfrm>
+          <a:prstGeom prst="rect">
+            <a:avLst/>
+          </a:prstGeom>
+          <a:solidFill>
+            <a:srgbClr val="FFFFFF"/>
+          </a:solidFill>
+          <a:ln>
+            <a:solidFill>
+              <a:srgbClr val="E2E8F0"/>
+            </a:solidFill>
+          </a:ln>
+        </p:spPr>
+        <p:style>
+          <a:lnRef idx="1">
+            <a:schemeClr val="accent1"/>
+          </a:lnRef>
+          <a:fillRef idx="3">
+            <a:schemeClr val="accent1"/>
+          </a:fillRef>
+          <a:effectRef idx="2">
+            <a:schemeClr val="accent1"/>
+          </a:effectRef>
+          <a:fontRef idx="minor">
+            <a:schemeClr val="lt1"/>
+          </a:fontRef>
+        </p:style>
+        <p:txBody>
+          <a:bodyPr rtlCol="0" anchor="ctr"/>
+          <a:lstStyle/>
+          <a:p>
+            <a:pPr algn="ctr"/>
+          </a:p>
+        </p:txBody>
+      </p:sp>
+      <p:sp>
+        <p:nvSpPr>
+          <p:cNvPr id="5" name="TextBox 4"/>
+          <p:cNvSpPr txBox="1"/>
+          <p:nvPr/>
+        </p:nvSpPr>
+        <p:spPr>
+          <a:xfrm>
+            <a:off x="6675120" y="1783080"/>
+            <a:ext cx="4572000" cy="4297680"/>
+          </a:xfrm>
+          <a:prstGeom prst="rect">
+            <a:avLst/>
+          </a:prstGeom>
+          <a:noFill/>
+        </p:spPr>
+        <p:txBody>
+          <a:bodyPr wrap="square">
+            <a:spAutoFit/>
+          </a:bodyPr>
+          <a:lstStyle/>
+          <a:p>
+            <a:pPr>
+              <a:defRPr sz="1300" b="1">
+                <a:solidFill>
+                  <a:srgbClr val="0284C7"/>
+                </a:solidFill>
+              </a:defRPr>
+            </a:pPr>
+            <a:r>
+              <a:t>Empirical Validation Results</a:t>
+            </a:r>
+          </a:p>
+          <a:p>
+            <a:pPr>
+              <a:spcBef>
+                <a:spcPts val="400"/>
+              </a:spcBef>
+              <a:defRPr sz="1050">
+                <a:solidFill>
+                  <a:srgbClr val="0F172A"/>
+                </a:solidFill>
+              </a:defRPr>
+            </a:pPr>
+            <a:r>
+              <a:t>• Random Forest Regressor R² Score: 0.8321 (~83.2% variance explained).</a:t>
+            </a:r>
+          </a:p>
+          <a:p>
+            <a:pPr>
+              <a:spcBef>
+                <a:spcPts val="400"/>
+              </a:spcBef>
+              <a:defRPr sz="1050">
+                <a:solidFill>
+                  <a:srgbClr val="0F172A"/>
+                </a:solidFill>
+              </a:defRPr>
+            </a:pPr>
+            <a:r>
+              <a:t>• PyTorch LSTM Regressor R² Score: 0.7566 (~75.7% accuracy).</a:t>
+            </a:r>
+          </a:p>
+          <a:p>
+            <a:pPr>
+              <a:spcBef>
+                <a:spcPts val="400"/>
+              </a:spcBef>
+              <a:defRPr sz="1050">
+                <a:solidFill>
+                  <a:srgbClr val="0F172A"/>
+                </a:solidFill>
+              </a:defRPr>
+            </a:pPr>
+            <a:r>
+              <a:t>• Mean Absolute Error (MAE): ₹1,136 on unseen test records.</a:t>
+            </a:r>
+          </a:p>
+          <a:p>
+            <a:pPr>
+              <a:spcBef>
+                <a:spcPts val="400"/>
+              </a:spcBef>
+              <a:defRPr sz="1050">
+                <a:solidFill>
+                  <a:srgbClr val="0F172A"/>
+                </a:solidFill>
+              </a:defRPr>
+            </a:pPr>
+            <a:r>
+              <a:t>• Dataset Split: 8,545 training observations, 2,137 test samples (80/20 train/test split).</a:t>
+            </a:r>
+          </a:p>
+          <a:p>
+            <a:pPr>
+              <a:spcBef>
+                <a:spcPts val="400"/>
+              </a:spcBef>
+              <a:defRPr sz="1050">
+                <a:solidFill>
+                  <a:srgbClr val="0F172A"/>
+                </a:solidFill>
+              </a:defRPr>
+            </a:pPr>
+            <a:r>
+              <a:t>• Layer Details: Bidirectional LSTM with 2 layers, 64 hidden units, SmoothL1Loss.</a:t>
             </a:r>
           </a:p>
         </p:txBody>
